--- a/docs/design/dist/d02-sw-architecture.pptx
+++ b/docs/design/dist/d02-sw-architecture.pptx
@@ -3104,8 +3104,8 @@
         </p:nvSpPr>
         <p:spPr>
           <a:xfrm>
-            <a:off x="381000" y="289560"/>
-            <a:ext cx="53340" cy="335280"/>
+            <a:off x="381000" y="274320"/>
+            <a:ext cx="53340" cy="548640"/>
           </a:xfrm>
           <a:prstGeom prst="roundRect">
             <a:avLst>
@@ -3113,7 +3113,7 @@
             </a:avLst>
           </a:prstGeom>
           <a:solidFill>
-            <a:srgbClr val="164B8C"/>
+            <a:srgbClr val="1F4E8C"/>
           </a:solidFill>
           <a:ln>
             <a:noFill/>
@@ -3135,8 +3135,8 @@
         </p:nvSpPr>
         <p:spPr>
           <a:xfrm>
-            <a:off x="533400" y="289560"/>
-            <a:ext cx="7620000" cy="304800"/>
+            <a:off x="533400" y="228600"/>
+            <a:ext cx="8001000" cy="365760"/>
           </a:xfrm>
           <a:prstGeom prst="rect">
             <a:avLst/>
@@ -3151,9 +3151,9 @@
           <a:p>
             <a:pPr algn="l"/>
             <a:r>
-              <a:rPr sz="1800" b="1">
+              <a:rPr sz="2160" b="1">
                 <a:solidFill>
-                  <a:srgbClr val="0A2342"/>
+                  <a:srgbClr val="0B2545"/>
                 </a:solidFill>
                 <a:latin typeface="Pretendard"/>
                 <a:ea typeface="Pretendard"/>
@@ -3172,8 +3172,8 @@
         </p:nvSpPr>
         <p:spPr>
           <a:xfrm>
-            <a:off x="533400" y="624840"/>
-            <a:ext cx="7620000" cy="167640"/>
+            <a:off x="533400" y="640080"/>
+            <a:ext cx="9144000" cy="182880"/>
           </a:xfrm>
           <a:prstGeom prst="rect">
             <a:avLst/>
@@ -3188,7 +3188,7 @@
           <a:p>
             <a:pPr algn="l"/>
             <a:r>
-              <a:rPr sz="960" b="0">
+              <a:rPr sz="1080" b="0">
                 <a:solidFill>
                   <a:srgbClr val="3F4E61"/>
                 </a:solidFill>
@@ -3209,8 +3209,8 @@
         </p:nvSpPr>
         <p:spPr>
           <a:xfrm>
-            <a:off x="8763000" y="426720"/>
-            <a:ext cx="3048000" cy="152400"/>
+            <a:off x="8382000" y="411480"/>
+            <a:ext cx="3429000" cy="167640"/>
           </a:xfrm>
           <a:prstGeom prst="rect">
             <a:avLst/>
@@ -3225,7 +3225,7 @@
           <a:p>
             <a:pPr algn="r"/>
             <a:r>
-              <a:rPr sz="840" b="0">
+              <a:rPr sz="1019" b="0">
                 <a:solidFill>
                   <a:srgbClr val="3F4E61"/>
                 </a:solidFill>
@@ -3233,7 +3233,7 @@
                 <a:ea typeface="Pretendard"/>
                 <a:cs typeface="Pretendard"/>
               </a:rPr>
-              <a:t>KDMS-D02 · v0.1 · 2026-10-06</a:t>
+              <a:t>KDMS-D02 · v0.2 · 2026-10-09</a:t>
             </a:r>
           </a:p>
         </p:txBody>
@@ -3246,20 +3246,20 @@
         </p:nvSpPr>
         <p:spPr>
           <a:xfrm>
-            <a:off x="762000" y="853440"/>
-            <a:ext cx="11049000" cy="1112520"/>
+            <a:off x="762000" y="914400"/>
+            <a:ext cx="11049000" cy="1249680"/>
           </a:xfrm>
           <a:prstGeom prst="roundRect">
             <a:avLst>
-              <a:gd name="adj" fmla="val 12328"/>
+              <a:gd name="adj" fmla="val 10975"/>
             </a:avLst>
           </a:prstGeom>
           <a:solidFill>
-            <a:srgbClr val="F1F6FC"/>
+            <a:srgbClr val="EEF6FD"/>
           </a:solidFill>
           <a:ln w="10668">
             <a:solidFill>
-              <a:srgbClr val="A9C3E2"/>
+              <a:srgbClr val="8EC3EC"/>
             </a:solidFill>
           </a:ln>
         </p:spPr>
@@ -3277,7 +3277,7 @@
             <a:r>
               <a:rPr sz="1200" b="1">
                 <a:solidFill>
-                  <a:srgbClr val="0A2342"/>
+                  <a:srgbClr val="0B2545"/>
                 </a:solidFill>
                 <a:latin typeface="Pretendard"/>
                 <a:ea typeface="Pretendard"/>
@@ -3289,11 +3289,11 @@
           <a:p>
             <a:pPr algn="l">
               <a:lnSpc>
-                <a:spcPts val="1200"/>
+                <a:spcPts val="1320"/>
               </a:lnSpc>
             </a:pPr>
             <a:r>
-              <a:rPr sz="869" b="0">
+              <a:rPr sz="1019" b="0">
                 <a:solidFill>
                   <a:srgbClr val="3F4E61"/>
                 </a:solidFill>
@@ -3307,11 +3307,11 @@
           <a:p>
             <a:pPr algn="l">
               <a:lnSpc>
-                <a:spcPts val="1200"/>
+                <a:spcPts val="1320"/>
               </a:lnSpc>
             </a:pPr>
             <a:r>
-              <a:rPr sz="869" b="0">
+              <a:rPr sz="1019" b="0">
                 <a:solidFill>
                   <a:srgbClr val="3F4E61"/>
                 </a:solidFill>
@@ -3332,20 +3332,20 @@
         </p:nvSpPr>
         <p:spPr>
           <a:xfrm>
-            <a:off x="762000" y="2072640"/>
-            <a:ext cx="11049000" cy="1219200"/>
+            <a:off x="762000" y="2255520"/>
+            <a:ext cx="11049000" cy="1249680"/>
           </a:xfrm>
           <a:prstGeom prst="roundRect">
             <a:avLst>
-              <a:gd name="adj" fmla="val 11250"/>
+              <a:gd name="adj" fmla="val 10975"/>
             </a:avLst>
           </a:prstGeom>
           <a:solidFill>
-            <a:srgbClr val="E8F1FB"/>
+            <a:srgbClr val="EEF6FD"/>
           </a:solidFill>
           <a:ln w="15240">
             <a:solidFill>
-              <a:srgbClr val="164B8C"/>
+              <a:srgbClr val="1F4E8C"/>
             </a:solidFill>
           </a:ln>
         </p:spPr>
@@ -3363,7 +3363,7 @@
             <a:r>
               <a:rPr sz="1200" b="1">
                 <a:solidFill>
-                  <a:srgbClr val="0A2342"/>
+                  <a:srgbClr val="0B2545"/>
                 </a:solidFill>
                 <a:latin typeface="Pretendard"/>
                 <a:ea typeface="Pretendard"/>
@@ -3375,11 +3375,11 @@
           <a:p>
             <a:pPr algn="l">
               <a:lnSpc>
-                <a:spcPts val="1200"/>
+                <a:spcPts val="1320"/>
               </a:lnSpc>
             </a:pPr>
             <a:r>
-              <a:rPr sz="869" b="0">
+              <a:rPr sz="1019" b="0">
                 <a:solidFill>
                   <a:srgbClr val="3F4E61"/>
                 </a:solidFill>
@@ -3393,11 +3393,11 @@
           <a:p>
             <a:pPr algn="l">
               <a:lnSpc>
-                <a:spcPts val="1200"/>
+                <a:spcPts val="1320"/>
               </a:lnSpc>
             </a:pPr>
             <a:r>
-              <a:rPr sz="869" b="0">
+              <a:rPr sz="1019" b="0">
                 <a:solidFill>
                   <a:srgbClr val="3F4E61"/>
                 </a:solidFill>
@@ -3418,20 +3418,20 @@
         </p:nvSpPr>
         <p:spPr>
           <a:xfrm>
-            <a:off x="762000" y="3398520"/>
-            <a:ext cx="11049000" cy="1219200"/>
+            <a:off x="762000" y="3596640"/>
+            <a:ext cx="11049000" cy="1249680"/>
           </a:xfrm>
           <a:prstGeom prst="roundRect">
             <a:avLst>
-              <a:gd name="adj" fmla="val 11250"/>
+              <a:gd name="adj" fmla="val 10975"/>
             </a:avLst>
           </a:prstGeom>
           <a:solidFill>
-            <a:srgbClr val="F1F6FC"/>
+            <a:srgbClr val="EEF6FD"/>
           </a:solidFill>
           <a:ln w="10668">
             <a:solidFill>
-              <a:srgbClr val="A9C3E2"/>
+              <a:srgbClr val="8EC3EC"/>
             </a:solidFill>
           </a:ln>
         </p:spPr>
@@ -3449,7 +3449,7 @@
             <a:r>
               <a:rPr sz="1200" b="1">
                 <a:solidFill>
-                  <a:srgbClr val="0A2342"/>
+                  <a:srgbClr val="0B2545"/>
                 </a:solidFill>
                 <a:latin typeface="Pretendard"/>
                 <a:ea typeface="Pretendard"/>
@@ -3461,11 +3461,11 @@
           <a:p>
             <a:pPr algn="l">
               <a:lnSpc>
-                <a:spcPts val="1200"/>
+                <a:spcPts val="1320"/>
               </a:lnSpc>
             </a:pPr>
             <a:r>
-              <a:rPr sz="869" b="0">
+              <a:rPr sz="1019" b="0">
                 <a:solidFill>
                   <a:srgbClr val="3F4E61"/>
                 </a:solidFill>
@@ -3479,11 +3479,11 @@
           <a:p>
             <a:pPr algn="l">
               <a:lnSpc>
-                <a:spcPts val="1200"/>
+                <a:spcPts val="1320"/>
               </a:lnSpc>
             </a:pPr>
             <a:r>
-              <a:rPr sz="869" b="0">
+              <a:rPr sz="1019" b="0">
                 <a:solidFill>
                   <a:srgbClr val="3F4E61"/>
                 </a:solidFill>
@@ -3504,20 +3504,20 @@
         </p:nvSpPr>
         <p:spPr>
           <a:xfrm>
-            <a:off x="762000" y="4724400"/>
-            <a:ext cx="11049000" cy="1219200"/>
+            <a:off x="762000" y="4937760"/>
+            <a:ext cx="11049000" cy="1249680"/>
           </a:xfrm>
           <a:prstGeom prst="roundRect">
             <a:avLst>
-              <a:gd name="adj" fmla="val 11250"/>
+              <a:gd name="adj" fmla="val 10975"/>
             </a:avLst>
           </a:prstGeom>
           <a:solidFill>
-            <a:srgbClr val="F1F6FC"/>
+            <a:srgbClr val="EEF6FD"/>
           </a:solidFill>
           <a:ln w="10668">
             <a:solidFill>
-              <a:srgbClr val="A9C3E2"/>
+              <a:srgbClr val="8EC3EC"/>
             </a:solidFill>
           </a:ln>
         </p:spPr>
@@ -3535,7 +3535,7 @@
             <a:r>
               <a:rPr sz="1200" b="1">
                 <a:solidFill>
-                  <a:srgbClr val="0A2342"/>
+                  <a:srgbClr val="0B2545"/>
                 </a:solidFill>
                 <a:latin typeface="Pretendard"/>
                 <a:ea typeface="Pretendard"/>
@@ -3547,11 +3547,11 @@
           <a:p>
             <a:pPr algn="l">
               <a:lnSpc>
-                <a:spcPts val="1200"/>
+                <a:spcPts val="1320"/>
               </a:lnSpc>
             </a:pPr>
             <a:r>
-              <a:rPr sz="869" b="0">
+              <a:rPr sz="1019" b="0">
                 <a:solidFill>
                   <a:srgbClr val="3F4E61"/>
                 </a:solidFill>
@@ -3565,11 +3565,11 @@
           <a:p>
             <a:pPr algn="l">
               <a:lnSpc>
-                <a:spcPts val="1200"/>
+                <a:spcPts val="1320"/>
               </a:lnSpc>
             </a:pPr>
             <a:r>
-              <a:rPr sz="869" b="0">
+              <a:rPr sz="1019" b="0">
                 <a:solidFill>
                   <a:srgbClr val="3F4E61"/>
                 </a:solidFill>
@@ -3590,15 +3590,15 @@
         </p:nvCxnSpPr>
         <p:spPr>
           <a:xfrm>
-            <a:off x="533400" y="914400"/>
-            <a:ext cx="0" cy="1828800"/>
+            <a:off x="533400" y="975360"/>
+            <a:ext cx="0" cy="1935480"/>
           </a:xfrm>
           <a:prstGeom prst="line">
             <a:avLst/>
           </a:prstGeom>
           <a:ln w="18288">
             <a:solidFill>
-              <a:srgbClr val="164B8C"/>
+              <a:srgbClr val="1F4E8C"/>
             </a:solidFill>
           </a:ln>
         </p:spPr>
@@ -3611,7 +3611,7 @@
         </p:nvCxnSpPr>
         <p:spPr>
           <a:xfrm>
-            <a:off x="533400" y="3810000"/>
+            <a:off x="533400" y="4038600"/>
             <a:ext cx="0" cy="2103120"/>
           </a:xfrm>
           <a:prstGeom prst="line">
@@ -3619,7 +3619,7 @@
           </a:prstGeom>
           <a:ln w="18288">
             <a:solidFill>
-              <a:srgbClr val="164B8C"/>
+              <a:srgbClr val="1F4E8C"/>
             </a:solidFill>
             <a:tailEnd type="triangle" w="med" len="med"/>
           </a:ln>
@@ -3633,38 +3633,38 @@
         </p:nvSpPr>
         <p:spPr>
           <a:xfrm>
-            <a:off x="2209800" y="960120"/>
-            <a:ext cx="3048000" cy="899160"/>
+            <a:off x="2209800" y="1021080"/>
+            <a:ext cx="3048000" cy="1036320"/>
           </a:xfrm>
           <a:prstGeom prst="roundRect">
             <a:avLst>
-              <a:gd name="adj" fmla="val 10169"/>
+              <a:gd name="adj" fmla="val 8823"/>
             </a:avLst>
           </a:prstGeom>
           <a:solidFill>
             <a:srgbClr val="FFFFFF"/>
           </a:solidFill>
-          <a:ln w="12192">
+          <a:ln w="13716">
             <a:solidFill>
-              <a:srgbClr val="6F9BD1"/>
+              <a:srgbClr val="8EC3EC"/>
             </a:solidFill>
           </a:ln>
         </p:spPr>
         <p:txBody>
-          <a:bodyPr rtlCol="0" anchor="t" lIns="45720" tIns="373380" rIns="45720" bIns="0" wrap="none">
+          <a:bodyPr rtlCol="0" anchor="t" lIns="45720" tIns="411480" rIns="45720" bIns="0" wrap="none">
             <a:noAutofit/>
           </a:bodyPr>
           <a:lstStyle/>
           <a:p>
             <a:pPr algn="ctr">
               <a:lnSpc>
-                <a:spcPts val="1439"/>
+                <a:spcPts val="1560"/>
               </a:lnSpc>
             </a:pPr>
             <a:r>
-              <a:rPr sz="1140" b="1">
+              <a:rPr sz="1200" b="1">
                 <a:solidFill>
-                  <a:srgbClr val="0A2342"/>
+                  <a:srgbClr val="0B2545"/>
                 </a:solidFill>
                 <a:latin typeface="Pretendard"/>
                 <a:ea typeface="Pretendard"/>
@@ -3676,11 +3676,11 @@
           <a:p>
             <a:pPr algn="ctr">
               <a:lnSpc>
-                <a:spcPts val="1140"/>
+                <a:spcPts val="1320"/>
               </a:lnSpc>
             </a:pPr>
             <a:r>
-              <a:rPr sz="869" b="0">
+              <a:rPr sz="1019" b="0">
                 <a:solidFill>
                   <a:srgbClr val="3F4E61"/>
                 </a:solidFill>
@@ -3694,11 +3694,11 @@
           <a:p>
             <a:pPr algn="ctr">
               <a:lnSpc>
-                <a:spcPts val="1140"/>
+                <a:spcPts val="1320"/>
               </a:lnSpc>
             </a:pPr>
             <a:r>
-              <a:rPr sz="869" b="0">
+              <a:rPr sz="1019" b="0">
                 <a:solidFill>
                   <a:srgbClr val="3F4E61"/>
                 </a:solidFill>
@@ -3719,7 +3719,7 @@
         </p:nvSpPr>
         <p:spPr>
           <a:xfrm>
-            <a:off x="3619500" y="1007428"/>
+            <a:off x="3619500" y="1106488"/>
             <a:ext cx="228600" cy="255904"/>
           </a:xfrm>
           <a:custGeom>
@@ -3929,7 +3929,7 @@
                   <a:pt x="9525" y="57467"/>
                 </a:lnTo>
                 <a:lnTo>
-                  <a:pt x="104775" y="2539"/>
+                  <a:pt x="104775" y="2540"/>
                 </a:lnTo>
                 <a:lnTo>
                   <a:pt x="105537" y="2134"/>
@@ -4001,7 +4001,7 @@
                   <a:pt x="123080" y="2134"/>
                 </a:lnTo>
                 <a:lnTo>
-                  <a:pt x="123825" y="2539"/>
+                  <a:pt x="123825" y="2540"/>
                 </a:lnTo>
                 <a:lnTo>
                   <a:pt x="219075" y="57467"/>
@@ -4236,7 +4236,7 @@
             </a:pathLst>
           </a:custGeom>
           <a:solidFill>
-            <a:srgbClr val="164B8C"/>
+            <a:srgbClr val="1F4E8C"/>
           </a:solidFill>
           <a:ln>
             <a:noFill/>
@@ -4258,38 +4258,38 @@
         </p:nvSpPr>
         <p:spPr>
           <a:xfrm>
-            <a:off x="5410200" y="960120"/>
-            <a:ext cx="3048000" cy="899160"/>
+            <a:off x="5410200" y="1021080"/>
+            <a:ext cx="3048000" cy="1036320"/>
           </a:xfrm>
           <a:prstGeom prst="roundRect">
             <a:avLst>
-              <a:gd name="adj" fmla="val 10169"/>
+              <a:gd name="adj" fmla="val 8823"/>
             </a:avLst>
           </a:prstGeom>
           <a:solidFill>
             <a:srgbClr val="FFFFFF"/>
           </a:solidFill>
-          <a:ln w="12192">
+          <a:ln w="13716">
             <a:solidFill>
-              <a:srgbClr val="6F9BD1"/>
+              <a:srgbClr val="8EC3EC"/>
             </a:solidFill>
           </a:ln>
         </p:spPr>
         <p:txBody>
-          <a:bodyPr rtlCol="0" anchor="t" lIns="45720" tIns="373380" rIns="45720" bIns="0" wrap="none">
+          <a:bodyPr rtlCol="0" anchor="t" lIns="45720" tIns="411480" rIns="45720" bIns="0" wrap="none">
             <a:noAutofit/>
           </a:bodyPr>
           <a:lstStyle/>
           <a:p>
             <a:pPr algn="ctr">
               <a:lnSpc>
-                <a:spcPts val="1439"/>
+                <a:spcPts val="1560"/>
               </a:lnSpc>
             </a:pPr>
             <a:r>
-              <a:rPr sz="1140" b="1">
+              <a:rPr sz="1200" b="1">
                 <a:solidFill>
-                  <a:srgbClr val="0A2342"/>
+                  <a:srgbClr val="0B2545"/>
                 </a:solidFill>
                 <a:latin typeface="Pretendard"/>
                 <a:ea typeface="Pretendard"/>
@@ -4301,11 +4301,11 @@
           <a:p>
             <a:pPr algn="ctr">
               <a:lnSpc>
-                <a:spcPts val="1140"/>
+                <a:spcPts val="1320"/>
               </a:lnSpc>
             </a:pPr>
             <a:r>
-              <a:rPr sz="869" b="0">
+              <a:rPr sz="1019" b="0">
                 <a:solidFill>
                   <a:srgbClr val="3F4E61"/>
                 </a:solidFill>
@@ -4313,17 +4313,17 @@
                 <a:ea typeface="Pretendard"/>
                 <a:cs typeface="Pretendard"/>
               </a:rPr>
-              <a:t>picocli 명령 · status · init · web</a:t>
+              <a:t>picocli 명령 10개</a:t>
             </a:r>
           </a:p>
           <a:p>
             <a:pPr algn="ctr">
               <a:lnSpc>
-                <a:spcPts val="1140"/>
+                <a:spcPts val="1320"/>
               </a:lnSpc>
             </a:pPr>
             <a:r>
-              <a:rPr sz="869" b="0">
+              <a:rPr sz="1019" b="0">
                 <a:solidFill>
                   <a:srgbClr val="3F4E61"/>
                 </a:solidFill>
@@ -4331,7 +4331,7 @@
                 <a:ea typeface="Pretendard"/>
                 <a:cs typeface="Pretendard"/>
               </a:rPr>
-              <a:t>plan · load · sync · cutover · verify</a:t>
+              <a:t>plan · load · sync · cutover 등</a:t>
             </a:r>
           </a:p>
         </p:txBody>
@@ -4344,7 +4344,7 @@
         </p:nvSpPr>
         <p:spPr>
           <a:xfrm>
-            <a:off x="6807200" y="1033780"/>
+            <a:off x="6807200" y="1132840"/>
             <a:ext cx="254000" cy="203200"/>
           </a:xfrm>
           <a:custGeom>
@@ -4717,7 +4717,7 @@
             </a:pathLst>
           </a:custGeom>
           <a:solidFill>
-            <a:srgbClr val="164B8C"/>
+            <a:srgbClr val="1F4E8C"/>
           </a:solidFill>
           <a:ln>
             <a:noFill/>
@@ -4739,38 +4739,38 @@
         </p:nvSpPr>
         <p:spPr>
           <a:xfrm>
-            <a:off x="8610600" y="960120"/>
-            <a:ext cx="3048000" cy="899160"/>
+            <a:off x="8610600" y="1021080"/>
+            <a:ext cx="3048000" cy="1036320"/>
           </a:xfrm>
           <a:prstGeom prst="roundRect">
             <a:avLst>
-              <a:gd name="adj" fmla="val 10169"/>
+              <a:gd name="adj" fmla="val 8823"/>
             </a:avLst>
           </a:prstGeom>
           <a:solidFill>
             <a:srgbClr val="FFFFFF"/>
           </a:solidFill>
-          <a:ln w="12192">
+          <a:ln w="13716">
             <a:solidFill>
-              <a:srgbClr val="6F9BD1"/>
+              <a:srgbClr val="8EC3EC"/>
             </a:solidFill>
           </a:ln>
         </p:spPr>
         <p:txBody>
-          <a:bodyPr rtlCol="0" anchor="t" lIns="45720" tIns="373380" rIns="45720" bIns="0" wrap="none">
+          <a:bodyPr rtlCol="0" anchor="t" lIns="45720" tIns="411480" rIns="45720" bIns="0" wrap="none">
             <a:noAutofit/>
           </a:bodyPr>
           <a:lstStyle/>
           <a:p>
             <a:pPr algn="ctr">
               <a:lnSpc>
-                <a:spcPts val="1439"/>
+                <a:spcPts val="1560"/>
               </a:lnSpc>
             </a:pPr>
             <a:r>
-              <a:rPr sz="1140" b="1">
+              <a:rPr sz="1200" b="1">
                 <a:solidFill>
-                  <a:srgbClr val="0A2342"/>
+                  <a:srgbClr val="0B2545"/>
                 </a:solidFill>
                 <a:latin typeface="Pretendard"/>
                 <a:ea typeface="Pretendard"/>
@@ -4782,11 +4782,11 @@
           <a:p>
             <a:pPr algn="ctr">
               <a:lnSpc>
-                <a:spcPts val="1140"/>
+                <a:spcPts val="1320"/>
               </a:lnSpc>
             </a:pPr>
             <a:r>
-              <a:rPr sz="869" b="0">
+              <a:rPr sz="1019" b="0">
                 <a:solidFill>
                   <a:srgbClr val="3F4E61"/>
                 </a:solidFill>
@@ -4794,17 +4794,17 @@
                 <a:ea typeface="Pretendard"/>
                 <a:cs typeface="Pretendard"/>
               </a:rPr>
-              <a:t>Spring MVC · Thymeleaf · 상태 REST</a:t>
+              <a:t>Spring MVC · Thymeleaf · REST</a:t>
             </a:r>
           </a:p>
           <a:p>
             <a:pPr algn="ctr">
               <a:lnSpc>
-                <a:spcPts val="1140"/>
+                <a:spcPts val="1320"/>
               </a:lnSpc>
             </a:pPr>
             <a:r>
-              <a:rPr sz="869" b="0">
+              <a:rPr sz="1019" b="0">
                 <a:solidFill>
                   <a:srgbClr val="3F4E61"/>
                 </a:solidFill>
@@ -4825,7 +4825,7 @@
         </p:nvSpPr>
         <p:spPr>
           <a:xfrm>
-            <a:off x="10007600" y="1033780"/>
+            <a:off x="10007600" y="1132840"/>
             <a:ext cx="254000" cy="203200"/>
           </a:xfrm>
           <a:custGeom>
@@ -5192,7 +5192,7 @@
             </a:pathLst>
           </a:custGeom>
           <a:solidFill>
-            <a:srgbClr val="164B8C"/>
+            <a:srgbClr val="1F4E8C"/>
           </a:solidFill>
           <a:ln>
             <a:noFill/>
@@ -5214,38 +5214,38 @@
         </p:nvSpPr>
         <p:spPr>
           <a:xfrm>
-            <a:off x="2209800" y="2217420"/>
-            <a:ext cx="1417320" cy="929640"/>
+            <a:off x="2209800" y="2362200"/>
+            <a:ext cx="1417320" cy="1036320"/>
           </a:xfrm>
           <a:prstGeom prst="roundRect">
             <a:avLst>
-              <a:gd name="adj" fmla="val 9836"/>
+              <a:gd name="adj" fmla="val 8823"/>
             </a:avLst>
           </a:prstGeom>
           <a:solidFill>
             <a:srgbClr val="FFFFFF"/>
           </a:solidFill>
-          <a:ln w="12192">
+          <a:ln w="13716">
             <a:solidFill>
-              <a:srgbClr val="6F9BD1"/>
+              <a:srgbClr val="8EC3EC"/>
             </a:solidFill>
           </a:ln>
         </p:spPr>
         <p:txBody>
-          <a:bodyPr rtlCol="0" anchor="t" lIns="45720" tIns="388620" rIns="45720" bIns="0" wrap="none">
+          <a:bodyPr rtlCol="0" anchor="t" lIns="45720" tIns="411480" rIns="45720" bIns="0" wrap="none">
             <a:noAutofit/>
           </a:bodyPr>
           <a:lstStyle/>
           <a:p>
             <a:pPr algn="ctr">
               <a:lnSpc>
-                <a:spcPts val="1439"/>
+                <a:spcPts val="1560"/>
               </a:lnSpc>
             </a:pPr>
             <a:r>
-              <a:rPr sz="1140" b="1">
+              <a:rPr sz="1200" b="1">
                 <a:solidFill>
-                  <a:srgbClr val="0A2342"/>
+                  <a:srgbClr val="0B2545"/>
                 </a:solidFill>
                 <a:latin typeface="Pretendard"/>
                 <a:ea typeface="Pretendard"/>
@@ -5257,11 +5257,11 @@
           <a:p>
             <a:pPr algn="ctr">
               <a:lnSpc>
-                <a:spcPts val="1140"/>
+                <a:spcPts val="1320"/>
               </a:lnSpc>
             </a:pPr>
             <a:r>
-              <a:rPr sz="869" b="0">
+              <a:rPr sz="1019" b="0">
                 <a:solidFill>
                   <a:srgbClr val="3F4E61"/>
                 </a:solidFill>
@@ -5275,11 +5275,11 @@
           <a:p>
             <a:pPr algn="ctr">
               <a:lnSpc>
-                <a:spcPts val="1140"/>
+                <a:spcPts val="1320"/>
               </a:lnSpc>
             </a:pPr>
             <a:r>
-              <a:rPr sz="869" b="0">
+              <a:rPr sz="1019" b="0">
                 <a:solidFill>
                   <a:srgbClr val="3F4E61"/>
                 </a:solidFill>
@@ -5300,7 +5300,7 @@
         </p:nvSpPr>
         <p:spPr>
           <a:xfrm>
-            <a:off x="2816860" y="2268220"/>
+            <a:off x="2816860" y="2435860"/>
             <a:ext cx="215900" cy="279400"/>
           </a:xfrm>
           <a:custGeom>
@@ -5467,7 +5467,7 @@
             </a:pathLst>
           </a:custGeom>
           <a:solidFill>
-            <a:srgbClr val="164B8C"/>
+            <a:srgbClr val="1F4E8C"/>
           </a:solidFill>
           <a:ln>
             <a:noFill/>
@@ -5489,38 +5489,38 @@
         </p:nvSpPr>
         <p:spPr>
           <a:xfrm>
-            <a:off x="3749040" y="2217420"/>
-            <a:ext cx="1417320" cy="929640"/>
+            <a:off x="3749040" y="2362200"/>
+            <a:ext cx="1417320" cy="1036320"/>
           </a:xfrm>
           <a:prstGeom prst="roundRect">
             <a:avLst>
-              <a:gd name="adj" fmla="val 9836"/>
+              <a:gd name="adj" fmla="val 8823"/>
             </a:avLst>
           </a:prstGeom>
           <a:solidFill>
             <a:srgbClr val="FFFFFF"/>
           </a:solidFill>
-          <a:ln w="12192">
+          <a:ln w="13716">
             <a:solidFill>
-              <a:srgbClr val="6F9BD1"/>
+              <a:srgbClr val="8EC3EC"/>
             </a:solidFill>
           </a:ln>
         </p:spPr>
         <p:txBody>
-          <a:bodyPr rtlCol="0" anchor="t" lIns="45720" tIns="388620" rIns="45720" bIns="0" wrap="none">
+          <a:bodyPr rtlCol="0" anchor="t" lIns="45720" tIns="411480" rIns="45720" bIns="0" wrap="none">
             <a:noAutofit/>
           </a:bodyPr>
           <a:lstStyle/>
           <a:p>
             <a:pPr algn="ctr">
               <a:lnSpc>
-                <a:spcPts val="1439"/>
+                <a:spcPts val="1560"/>
               </a:lnSpc>
             </a:pPr>
             <a:r>
-              <a:rPr sz="1140" b="1">
+              <a:rPr sz="1200" b="1">
                 <a:solidFill>
-                  <a:srgbClr val="0A2342"/>
+                  <a:srgbClr val="0B2545"/>
                 </a:solidFill>
                 <a:latin typeface="Pretendard"/>
                 <a:ea typeface="Pretendard"/>
@@ -5532,11 +5532,11 @@
           <a:p>
             <a:pPr algn="ctr">
               <a:lnSpc>
-                <a:spcPts val="1140"/>
+                <a:spcPts val="1320"/>
               </a:lnSpc>
             </a:pPr>
             <a:r>
-              <a:rPr sz="869" b="0">
+              <a:rPr sz="1019" b="0">
                 <a:solidFill>
                   <a:srgbClr val="3F4E61"/>
                 </a:solidFill>
@@ -5550,11 +5550,11 @@
           <a:p>
             <a:pPr algn="ctr">
               <a:lnSpc>
-                <a:spcPts val="1140"/>
+                <a:spcPts val="1320"/>
               </a:lnSpc>
             </a:pPr>
             <a:r>
-              <a:rPr sz="869" b="0">
+              <a:rPr sz="1019" b="0">
                 <a:solidFill>
                   <a:srgbClr val="3F4E61"/>
                 </a:solidFill>
@@ -5575,7 +5575,7 @@
         </p:nvSpPr>
         <p:spPr>
           <a:xfrm>
-            <a:off x="4343400" y="2293620"/>
+            <a:off x="4343400" y="2461260"/>
             <a:ext cx="254000" cy="254000"/>
           </a:xfrm>
           <a:custGeom>
@@ -7831,7 +7831,7 @@
             </a:pathLst>
           </a:custGeom>
           <a:solidFill>
-            <a:srgbClr val="164B8C"/>
+            <a:srgbClr val="1F4E8C"/>
           </a:solidFill>
           <a:ln>
             <a:noFill/>
@@ -7853,38 +7853,38 @@
         </p:nvSpPr>
         <p:spPr>
           <a:xfrm>
-            <a:off x="5288280" y="2217420"/>
-            <a:ext cx="1417320" cy="929640"/>
+            <a:off x="5288280" y="2362200"/>
+            <a:ext cx="1417320" cy="1036320"/>
           </a:xfrm>
           <a:prstGeom prst="roundRect">
             <a:avLst>
-              <a:gd name="adj" fmla="val 9836"/>
+              <a:gd name="adj" fmla="val 8823"/>
             </a:avLst>
           </a:prstGeom>
           <a:solidFill>
             <a:srgbClr val="FFFFFF"/>
           </a:solidFill>
-          <a:ln w="12192">
+          <a:ln w="13716">
             <a:solidFill>
-              <a:srgbClr val="6F9BD1"/>
+              <a:srgbClr val="8EC3EC"/>
             </a:solidFill>
           </a:ln>
         </p:spPr>
         <p:txBody>
-          <a:bodyPr rtlCol="0" anchor="t" lIns="45720" tIns="388620" rIns="45720" bIns="0" wrap="none">
+          <a:bodyPr rtlCol="0" anchor="t" lIns="45720" tIns="411480" rIns="45720" bIns="0" wrap="none">
             <a:noAutofit/>
           </a:bodyPr>
           <a:lstStyle/>
           <a:p>
             <a:pPr algn="ctr">
               <a:lnSpc>
-                <a:spcPts val="1439"/>
+                <a:spcPts val="1560"/>
               </a:lnSpc>
             </a:pPr>
             <a:r>
-              <a:rPr sz="1140" b="1">
+              <a:rPr sz="1200" b="1">
                 <a:solidFill>
-                  <a:srgbClr val="0A2342"/>
+                  <a:srgbClr val="0B2545"/>
                 </a:solidFill>
                 <a:latin typeface="Pretendard"/>
                 <a:ea typeface="Pretendard"/>
@@ -7896,11 +7896,11 @@
           <a:p>
             <a:pPr algn="ctr">
               <a:lnSpc>
-                <a:spcPts val="1140"/>
+                <a:spcPts val="1320"/>
               </a:lnSpc>
             </a:pPr>
             <a:r>
-              <a:rPr sz="869" b="0">
+              <a:rPr sz="1019" b="0">
                 <a:solidFill>
                   <a:srgbClr val="3F4E61"/>
                 </a:solidFill>
@@ -7914,11 +7914,11 @@
           <a:p>
             <a:pPr algn="ctr">
               <a:lnSpc>
-                <a:spcPts val="1140"/>
+                <a:spcPts val="1320"/>
               </a:lnSpc>
             </a:pPr>
             <a:r>
-              <a:rPr sz="869" b="0">
+              <a:rPr sz="1019" b="0">
                 <a:solidFill>
                   <a:srgbClr val="3F4E61"/>
                 </a:solidFill>
@@ -7939,7 +7939,7 @@
         </p:nvSpPr>
         <p:spPr>
           <a:xfrm>
-            <a:off x="5867400" y="2293620"/>
+            <a:off x="5867400" y="2461260"/>
             <a:ext cx="259080" cy="228600"/>
           </a:xfrm>
           <a:custGeom>
@@ -8354,7 +8354,7 @@
             </a:pathLst>
           </a:custGeom>
           <a:solidFill>
-            <a:srgbClr val="164B8C"/>
+            <a:srgbClr val="1F4E8C"/>
           </a:solidFill>
           <a:ln>
             <a:noFill/>
@@ -8376,38 +8376,38 @@
         </p:nvSpPr>
         <p:spPr>
           <a:xfrm>
-            <a:off x="6827520" y="2217420"/>
-            <a:ext cx="1417320" cy="929640"/>
+            <a:off x="6827520" y="2362200"/>
+            <a:ext cx="1417320" cy="1036320"/>
           </a:xfrm>
           <a:prstGeom prst="roundRect">
             <a:avLst>
-              <a:gd name="adj" fmla="val 9836"/>
+              <a:gd name="adj" fmla="val 8823"/>
             </a:avLst>
           </a:prstGeom>
           <a:solidFill>
-            <a:srgbClr val="D3E5F8"/>
+            <a:srgbClr val="0B2545"/>
           </a:solidFill>
           <a:ln w="18288">
             <a:solidFill>
-              <a:srgbClr val="0F3C78"/>
+              <a:srgbClr val="0B2545"/>
             </a:solidFill>
           </a:ln>
         </p:spPr>
         <p:txBody>
-          <a:bodyPr rtlCol="0" anchor="t" lIns="45720" tIns="388620" rIns="45720" bIns="0" wrap="none">
+          <a:bodyPr rtlCol="0" anchor="t" lIns="45720" tIns="411480" rIns="45720" bIns="0" wrap="none">
             <a:noAutofit/>
           </a:bodyPr>
           <a:lstStyle/>
           <a:p>
             <a:pPr algn="ctr">
               <a:lnSpc>
-                <a:spcPts val="1439"/>
+                <a:spcPts val="1560"/>
               </a:lnSpc>
             </a:pPr>
             <a:r>
-              <a:rPr sz="1140" b="1">
+              <a:rPr sz="1200" b="1">
                 <a:solidFill>
-                  <a:srgbClr val="0A2342"/>
+                  <a:srgbClr val="FFFFFF"/>
                 </a:solidFill>
                 <a:latin typeface="Pretendard"/>
                 <a:ea typeface="Pretendard"/>
@@ -8419,13 +8419,13 @@
           <a:p>
             <a:pPr algn="ctr">
               <a:lnSpc>
-                <a:spcPts val="1140"/>
+                <a:spcPts val="1320"/>
               </a:lnSpc>
             </a:pPr>
             <a:r>
-              <a:rPr sz="869" b="0">
+              <a:rPr sz="1019" b="0">
                 <a:solidFill>
-                  <a:srgbClr val="3F4E61"/>
+                  <a:srgbClr val="FFFFFF"/>
                 </a:solidFill>
                 <a:latin typeface="Pretendard"/>
                 <a:ea typeface="Pretendard"/>
@@ -8437,13 +8437,13 @@
           <a:p>
             <a:pPr algn="ctr">
               <a:lnSpc>
-                <a:spcPts val="1140"/>
+                <a:spcPts val="1320"/>
               </a:lnSpc>
             </a:pPr>
             <a:r>
-              <a:rPr sz="869" b="0">
+              <a:rPr sz="1019" b="0">
                 <a:solidFill>
-                  <a:srgbClr val="3F4E61"/>
+                  <a:srgbClr val="FFFFFF"/>
                 </a:solidFill>
                 <a:latin typeface="Pretendard"/>
                 <a:ea typeface="Pretendard"/>
@@ -8462,7 +8462,7 @@
         </p:nvSpPr>
         <p:spPr>
           <a:xfrm>
-            <a:off x="7434580" y="2306320"/>
+            <a:off x="7434580" y="2473960"/>
             <a:ext cx="203200" cy="203200"/>
           </a:xfrm>
           <a:custGeom>
@@ -9115,7 +9115,7 @@
             </a:pathLst>
           </a:custGeom>
           <a:solidFill>
-            <a:srgbClr val="164B8C"/>
+            <a:srgbClr val="FFFFFF"/>
           </a:solidFill>
           <a:ln>
             <a:noFill/>
@@ -9137,38 +9137,38 @@
         </p:nvSpPr>
         <p:spPr>
           <a:xfrm>
-            <a:off x="8702040" y="2217420"/>
-            <a:ext cx="1417320" cy="929640"/>
+            <a:off x="8702040" y="2362200"/>
+            <a:ext cx="1417320" cy="1036320"/>
           </a:xfrm>
           <a:prstGeom prst="roundRect">
             <a:avLst>
-              <a:gd name="adj" fmla="val 9836"/>
+              <a:gd name="adj" fmla="val 8823"/>
             </a:avLst>
           </a:prstGeom>
           <a:solidFill>
-            <a:srgbClr val="D3E5F8"/>
+            <a:srgbClr val="0B2545"/>
           </a:solidFill>
           <a:ln w="18288">
             <a:solidFill>
-              <a:srgbClr val="0F3C78"/>
+              <a:srgbClr val="0B2545"/>
             </a:solidFill>
           </a:ln>
         </p:spPr>
         <p:txBody>
-          <a:bodyPr rtlCol="0" anchor="t" lIns="45720" tIns="388620" rIns="45720" bIns="0" wrap="none">
+          <a:bodyPr rtlCol="0" anchor="t" lIns="45720" tIns="411480" rIns="45720" bIns="0" wrap="none">
             <a:noAutofit/>
           </a:bodyPr>
           <a:lstStyle/>
           <a:p>
             <a:pPr algn="ctr">
               <a:lnSpc>
-                <a:spcPts val="1439"/>
+                <a:spcPts val="1560"/>
               </a:lnSpc>
             </a:pPr>
             <a:r>
-              <a:rPr sz="1140" b="1">
+              <a:rPr sz="1200" b="1">
                 <a:solidFill>
-                  <a:srgbClr val="0A2342"/>
+                  <a:srgbClr val="FFFFFF"/>
                 </a:solidFill>
                 <a:latin typeface="Pretendard"/>
                 <a:ea typeface="Pretendard"/>
@@ -9180,13 +9180,13 @@
           <a:p>
             <a:pPr algn="ctr">
               <a:lnSpc>
-                <a:spcPts val="1140"/>
+                <a:spcPts val="1320"/>
               </a:lnSpc>
             </a:pPr>
             <a:r>
-              <a:rPr sz="869" b="0">
+              <a:rPr sz="1019" b="0">
                 <a:solidFill>
-                  <a:srgbClr val="3F4E61"/>
+                  <a:srgbClr val="FFFFFF"/>
                 </a:solidFill>
                 <a:latin typeface="Pretendard"/>
                 <a:ea typeface="Pretendard"/>
@@ -9198,13 +9198,13 @@
           <a:p>
             <a:pPr algn="ctr">
               <a:lnSpc>
-                <a:spcPts val="1140"/>
+                <a:spcPts val="1320"/>
               </a:lnSpc>
             </a:pPr>
             <a:r>
-              <a:rPr sz="869" b="0">
+              <a:rPr sz="1019" b="0">
                 <a:solidFill>
-                  <a:srgbClr val="3F4E61"/>
+                  <a:srgbClr val="FFFFFF"/>
                 </a:solidFill>
                 <a:latin typeface="Pretendard"/>
                 <a:ea typeface="Pretendard"/>
@@ -9223,7 +9223,7 @@
         </p:nvSpPr>
         <p:spPr>
           <a:xfrm>
-            <a:off x="9286875" y="2281555"/>
+            <a:off x="9286875" y="2449195"/>
             <a:ext cx="247650" cy="252730"/>
           </a:xfrm>
           <a:custGeom>
@@ -9958,7 +9958,7 @@
             </a:pathLst>
           </a:custGeom>
           <a:solidFill>
-            <a:srgbClr val="164B8C"/>
+            <a:srgbClr val="FFFFFF"/>
           </a:solidFill>
           <a:ln>
             <a:noFill/>
@@ -9980,38 +9980,38 @@
         </p:nvSpPr>
         <p:spPr>
           <a:xfrm>
-            <a:off x="10241280" y="2217420"/>
-            <a:ext cx="1417320" cy="929640"/>
+            <a:off x="10241280" y="2362200"/>
+            <a:ext cx="1417320" cy="1036320"/>
           </a:xfrm>
           <a:prstGeom prst="roundRect">
             <a:avLst>
-              <a:gd name="adj" fmla="val 9836"/>
+              <a:gd name="adj" fmla="val 8823"/>
             </a:avLst>
           </a:prstGeom>
           <a:solidFill>
             <a:srgbClr val="FFFFFF"/>
           </a:solidFill>
-          <a:ln w="12192">
+          <a:ln w="13716">
             <a:solidFill>
-              <a:srgbClr val="6F9BD1"/>
+              <a:srgbClr val="8EC3EC"/>
             </a:solidFill>
           </a:ln>
         </p:spPr>
         <p:txBody>
-          <a:bodyPr rtlCol="0" anchor="t" lIns="45720" tIns="388620" rIns="45720" bIns="0" wrap="none">
+          <a:bodyPr rtlCol="0" anchor="t" lIns="45720" tIns="411480" rIns="45720" bIns="0" wrap="none">
             <a:noAutofit/>
           </a:bodyPr>
           <a:lstStyle/>
           <a:p>
             <a:pPr algn="ctr">
               <a:lnSpc>
-                <a:spcPts val="1439"/>
+                <a:spcPts val="1560"/>
               </a:lnSpc>
             </a:pPr>
             <a:r>
-              <a:rPr sz="1140" b="1">
+              <a:rPr sz="1200" b="1">
                 <a:solidFill>
-                  <a:srgbClr val="0A2342"/>
+                  <a:srgbClr val="0B2545"/>
                 </a:solidFill>
                 <a:latin typeface="Pretendard"/>
                 <a:ea typeface="Pretendard"/>
@@ -10023,11 +10023,11 @@
           <a:p>
             <a:pPr algn="ctr">
               <a:lnSpc>
-                <a:spcPts val="1140"/>
+                <a:spcPts val="1320"/>
               </a:lnSpc>
             </a:pPr>
             <a:r>
-              <a:rPr sz="869" b="0">
+              <a:rPr sz="1019" b="0">
                 <a:solidFill>
                   <a:srgbClr val="3F4E61"/>
                 </a:solidFill>
@@ -10041,11 +10041,11 @@
           <a:p>
             <a:pPr algn="ctr">
               <a:lnSpc>
-                <a:spcPts val="1140"/>
+                <a:spcPts val="1320"/>
               </a:lnSpc>
             </a:pPr>
             <a:r>
-              <a:rPr sz="869" b="0">
+              <a:rPr sz="1019" b="0">
                 <a:solidFill>
                   <a:srgbClr val="3F4E61"/>
                 </a:solidFill>
@@ -10066,7 +10066,7 @@
         </p:nvSpPr>
         <p:spPr>
           <a:xfrm>
-            <a:off x="10822940" y="2306320"/>
+            <a:off x="10822940" y="2473960"/>
             <a:ext cx="254000" cy="203200"/>
           </a:xfrm>
           <a:custGeom>
@@ -10143,7 +10143,7 @@
             </a:pathLst>
           </a:custGeom>
           <a:solidFill>
-            <a:srgbClr val="164B8C"/>
+            <a:srgbClr val="1F4E8C"/>
           </a:solidFill>
           <a:ln>
             <a:noFill/>
@@ -10165,38 +10165,38 @@
         </p:nvSpPr>
         <p:spPr>
           <a:xfrm>
-            <a:off x="2209800" y="3543300"/>
-            <a:ext cx="2247900" cy="929640"/>
+            <a:off x="2209800" y="3703320"/>
+            <a:ext cx="2247900" cy="1036320"/>
           </a:xfrm>
           <a:prstGeom prst="roundRect">
             <a:avLst>
-              <a:gd name="adj" fmla="val 9836"/>
+              <a:gd name="adj" fmla="val 8823"/>
             </a:avLst>
           </a:prstGeom>
           <a:solidFill>
             <a:srgbClr val="FFFFFF"/>
           </a:solidFill>
-          <a:ln w="12192">
+          <a:ln w="13716">
             <a:solidFill>
-              <a:srgbClr val="6F9BD1"/>
+              <a:srgbClr val="8EC3EC"/>
             </a:solidFill>
           </a:ln>
         </p:spPr>
         <p:txBody>
-          <a:bodyPr rtlCol="0" anchor="t" lIns="45720" tIns="388620" rIns="45720" bIns="0" wrap="none">
+          <a:bodyPr rtlCol="0" anchor="t" lIns="45720" tIns="411480" rIns="45720" bIns="0" wrap="none">
             <a:noAutofit/>
           </a:bodyPr>
           <a:lstStyle/>
           <a:p>
             <a:pPr algn="ctr">
               <a:lnSpc>
-                <a:spcPts val="1439"/>
+                <a:spcPts val="1560"/>
               </a:lnSpc>
             </a:pPr>
             <a:r>
-              <a:rPr sz="1140" b="1">
+              <a:rPr sz="1200" b="1">
                 <a:solidFill>
-                  <a:srgbClr val="0A2342"/>
+                  <a:srgbClr val="0B2545"/>
                 </a:solidFill>
                 <a:latin typeface="Pretendard"/>
                 <a:ea typeface="Pretendard"/>
@@ -10208,11 +10208,11 @@
           <a:p>
             <a:pPr algn="ctr">
               <a:lnSpc>
-                <a:spcPts val="1140"/>
+                <a:spcPts val="1320"/>
               </a:lnSpc>
             </a:pPr>
             <a:r>
-              <a:rPr sz="869" b="0">
+              <a:rPr sz="1019" b="0">
                 <a:solidFill>
                   <a:srgbClr val="3F4E61"/>
                 </a:solidFill>
@@ -10226,11 +10226,11 @@
           <a:p>
             <a:pPr algn="ctr">
               <a:lnSpc>
-                <a:spcPts val="1140"/>
+                <a:spcPts val="1320"/>
               </a:lnSpc>
             </a:pPr>
             <a:r>
-              <a:rPr sz="869" b="0">
+              <a:rPr sz="1019" b="0">
                 <a:solidFill>
                   <a:srgbClr val="3F4E61"/>
                 </a:solidFill>
@@ -10238,7 +10238,7 @@
                 <a:ea typeface="Pretendard"/>
                 <a:cs typeface="Pretendard"/>
               </a:rPr>
-              <a:t>접속 확인 1단계 · 카탈로그 2단계</a:t>
+              <a:t>접속 확인 · 카탈로그</a:t>
             </a:r>
           </a:p>
         </p:txBody>
@@ -10251,7 +10251,7 @@
         </p:nvSpPr>
         <p:spPr>
           <a:xfrm>
-            <a:off x="3206750" y="3657600"/>
+            <a:off x="3206750" y="3840480"/>
             <a:ext cx="254000" cy="165100"/>
           </a:xfrm>
           <a:custGeom>
@@ -10936,7 +10936,7 @@
                   <a:pt x="118824" y="92725"/>
                 </a:lnTo>
                 <a:lnTo>
-                  <a:pt x="120891" y="94932"/>
+                  <a:pt x="120891" y="94933"/>
                 </a:lnTo>
                 <a:lnTo>
                   <a:pt x="123087" y="97012"/>
@@ -10979,7 +10979,7 @@
             </a:pathLst>
           </a:custGeom>
           <a:solidFill>
-            <a:srgbClr val="164B8C"/>
+            <a:srgbClr val="1F4E8C"/>
           </a:solidFill>
           <a:ln>
             <a:noFill/>
@@ -11001,38 +11001,38 @@
         </p:nvSpPr>
         <p:spPr>
           <a:xfrm>
-            <a:off x="4610100" y="3543300"/>
-            <a:ext cx="2247900" cy="929640"/>
+            <a:off x="4610100" y="3703320"/>
+            <a:ext cx="2247900" cy="1036320"/>
           </a:xfrm>
           <a:prstGeom prst="roundRect">
             <a:avLst>
-              <a:gd name="adj" fmla="val 9836"/>
+              <a:gd name="adj" fmla="val 8823"/>
             </a:avLst>
           </a:prstGeom>
           <a:solidFill>
             <a:srgbClr val="FFFFFF"/>
           </a:solidFill>
-          <a:ln w="12192">
+          <a:ln w="13716">
             <a:solidFill>
-              <a:srgbClr val="6F9BD1"/>
+              <a:srgbClr val="8EC3EC"/>
             </a:solidFill>
           </a:ln>
         </p:spPr>
         <p:txBody>
-          <a:bodyPr rtlCol="0" anchor="t" lIns="45720" tIns="388620" rIns="45720" bIns="0" wrap="none">
+          <a:bodyPr rtlCol="0" anchor="t" lIns="45720" tIns="411480" rIns="45720" bIns="0" wrap="none">
             <a:noAutofit/>
           </a:bodyPr>
           <a:lstStyle/>
           <a:p>
             <a:pPr algn="ctr">
               <a:lnSpc>
-                <a:spcPts val="1439"/>
+                <a:spcPts val="1560"/>
               </a:lnSpc>
             </a:pPr>
             <a:r>
-              <a:rPr sz="1140" b="1">
+              <a:rPr sz="1200" b="1">
                 <a:solidFill>
-                  <a:srgbClr val="0A2342"/>
+                  <a:srgbClr val="0B2545"/>
                 </a:solidFill>
                 <a:latin typeface="Pretendard"/>
                 <a:ea typeface="Pretendard"/>
@@ -11044,11 +11044,11 @@
           <a:p>
             <a:pPr algn="ctr">
               <a:lnSpc>
-                <a:spcPts val="1140"/>
+                <a:spcPts val="1320"/>
               </a:lnSpc>
             </a:pPr>
             <a:r>
-              <a:rPr sz="869" b="0">
+              <a:rPr sz="1019" b="0">
                 <a:solidFill>
                   <a:srgbClr val="3F4E61"/>
                 </a:solidFill>
@@ -11062,11 +11062,11 @@
           <a:p>
             <a:pPr algn="ctr">
               <a:lnSpc>
-                <a:spcPts val="1140"/>
+                <a:spcPts val="1320"/>
               </a:lnSpc>
             </a:pPr>
             <a:r>
-              <a:rPr sz="869" b="0">
+              <a:rPr sz="1019" b="0">
                 <a:solidFill>
                   <a:srgbClr val="3F4E61"/>
                 </a:solidFill>
@@ -11087,7 +11087,7 @@
         </p:nvSpPr>
         <p:spPr>
           <a:xfrm>
-            <a:off x="5622290" y="3632200"/>
+            <a:off x="5622290" y="3815080"/>
             <a:ext cx="249555" cy="241300"/>
           </a:xfrm>
           <a:custGeom>
@@ -11405,10 +11405,10 @@
                   <a:pt x="53022" y="169545"/>
                 </a:lnTo>
                 <a:lnTo>
-                  <a:pt x="53022" y="132398"/>
-                </a:lnTo>
-                <a:lnTo>
-                  <a:pt x="72072" y="132398"/>
+                  <a:pt x="53022" y="132397"/>
+                </a:lnTo>
+                <a:lnTo>
+                  <a:pt x="72072" y="132397"/>
                 </a:lnTo>
                 <a:lnTo>
                   <a:pt x="72072" y="203200"/>
@@ -11668,7 +11668,7 @@
                   <a:pt x="155646" y="213143"/>
                 </a:lnTo>
                 <a:lnTo>
-                  <a:pt x="154940" y="212408"/>
+                  <a:pt x="154940" y="212407"/>
                 </a:lnTo>
                 <a:lnTo>
                   <a:pt x="141605" y="218758"/>
@@ -11764,10 +11764,10 @@
                   <a:pt x="155646" y="144462"/>
                 </a:lnTo>
                 <a:lnTo>
-                  <a:pt x="156386" y="143828"/>
-                </a:lnTo>
-                <a:lnTo>
-                  <a:pt x="157162" y="143192"/>
+                  <a:pt x="156386" y="143827"/>
+                </a:lnTo>
+                <a:lnTo>
+                  <a:pt x="157162" y="143193"/>
                 </a:lnTo>
                 <a:lnTo>
                   <a:pt x="157974" y="142558"/>
@@ -11782,10 +11782,10 @@
                   <a:pt x="160620" y="140652"/>
                 </a:lnTo>
                 <a:lnTo>
-                  <a:pt x="161572" y="140018"/>
-                </a:lnTo>
-                <a:lnTo>
-                  <a:pt x="162560" y="139382"/>
+                  <a:pt x="161572" y="140017"/>
+                </a:lnTo>
+                <a:lnTo>
+                  <a:pt x="162560" y="139383"/>
                 </a:lnTo>
                 <a:lnTo>
                   <a:pt x="163583" y="138748"/>
@@ -11830,7 +11830,7 @@
                   <a:pt x="177692" y="132093"/>
                 </a:lnTo>
                 <a:lnTo>
-                  <a:pt x="178752" y="131762"/>
+                  <a:pt x="178752" y="131763"/>
                 </a:lnTo>
                 <a:lnTo>
                   <a:pt x="180340" y="116205"/>
@@ -11839,7 +11839,7 @@
                   <a:pt x="199390" y="116205"/>
                 </a:lnTo>
                 <a:lnTo>
-                  <a:pt x="201295" y="131762"/>
+                  <a:pt x="201295" y="131763"/>
                 </a:lnTo>
                 <a:lnTo>
                   <a:pt x="202356" y="132093"/>
@@ -11884,10 +11884,10 @@
                   <a:pt x="216464" y="138748"/>
                 </a:lnTo>
                 <a:lnTo>
-                  <a:pt x="217488" y="139382"/>
-                </a:lnTo>
-                <a:lnTo>
-                  <a:pt x="218475" y="140018"/>
+                  <a:pt x="217488" y="139383"/>
+                </a:lnTo>
+                <a:lnTo>
+                  <a:pt x="218475" y="140017"/>
                 </a:lnTo>
                 <a:lnTo>
                   <a:pt x="219428" y="140652"/>
@@ -11902,10 +11902,10 @@
                   <a:pt x="222074" y="142558"/>
                 </a:lnTo>
                 <a:lnTo>
-                  <a:pt x="222885" y="143192"/>
-                </a:lnTo>
-                <a:lnTo>
-                  <a:pt x="223661" y="143828"/>
+                  <a:pt x="222885" y="143193"/>
+                </a:lnTo>
+                <a:lnTo>
+                  <a:pt x="223661" y="143827"/>
                 </a:lnTo>
                 <a:lnTo>
                   <a:pt x="224402" y="144462"/>
@@ -12001,7 +12001,7 @@
                   <a:pt x="238442" y="218758"/>
                 </a:lnTo>
                 <a:lnTo>
-                  <a:pt x="225108" y="212408"/>
+                  <a:pt x="225108" y="212407"/>
                 </a:lnTo>
                 <a:lnTo>
                   <a:pt x="224402" y="213143"/>
@@ -12179,7 +12179,7 @@
                   <a:pt x="219117" y="164075"/>
                 </a:lnTo>
                 <a:lnTo>
-                  <a:pt x="218158" y="162242"/>
+                  <a:pt x="218158" y="162243"/>
                 </a:lnTo>
                 <a:lnTo>
                   <a:pt x="217071" y="160476"/>
@@ -12275,7 +12275,7 @@
                   <a:pt x="162659" y="160476"/>
                 </a:lnTo>
                 <a:lnTo>
-                  <a:pt x="161572" y="162242"/>
+                  <a:pt x="161572" y="162243"/>
                 </a:lnTo>
                 <a:lnTo>
                   <a:pt x="160613" y="164075"/>
@@ -12378,7 +12378,7 @@
             </a:pathLst>
           </a:custGeom>
           <a:solidFill>
-            <a:srgbClr val="164B8C"/>
+            <a:srgbClr val="1F4E8C"/>
           </a:solidFill>
           <a:ln>
             <a:noFill/>
@@ -12400,38 +12400,38 @@
         </p:nvSpPr>
         <p:spPr>
           <a:xfrm>
-            <a:off x="7010400" y="3543300"/>
-            <a:ext cx="2247900" cy="929640"/>
+            <a:off x="7010400" y="3703320"/>
+            <a:ext cx="2247900" cy="1036320"/>
           </a:xfrm>
           <a:prstGeom prst="roundRect">
             <a:avLst>
-              <a:gd name="adj" fmla="val 9836"/>
+              <a:gd name="adj" fmla="val 8823"/>
             </a:avLst>
           </a:prstGeom>
           <a:solidFill>
             <a:srgbClr val="FFFFFF"/>
           </a:solidFill>
-          <a:ln w="12192">
+          <a:ln w="13716">
             <a:solidFill>
-              <a:srgbClr val="6F9BD1"/>
+              <a:srgbClr val="8EC3EC"/>
             </a:solidFill>
           </a:ln>
         </p:spPr>
         <p:txBody>
-          <a:bodyPr rtlCol="0" anchor="t" lIns="45720" tIns="388620" rIns="45720" bIns="0" wrap="none">
+          <a:bodyPr rtlCol="0" anchor="t" lIns="45720" tIns="411480" rIns="45720" bIns="0" wrap="none">
             <a:noAutofit/>
           </a:bodyPr>
           <a:lstStyle/>
           <a:p>
             <a:pPr algn="ctr">
               <a:lnSpc>
-                <a:spcPts val="1439"/>
+                <a:spcPts val="1560"/>
               </a:lnSpc>
             </a:pPr>
             <a:r>
-              <a:rPr sz="1140" b="1">
+              <a:rPr sz="1200" b="1">
                 <a:solidFill>
-                  <a:srgbClr val="0A2342"/>
+                  <a:srgbClr val="0B2545"/>
                 </a:solidFill>
                 <a:latin typeface="Pretendard"/>
                 <a:ea typeface="Pretendard"/>
@@ -12443,11 +12443,11 @@
           <a:p>
             <a:pPr algn="ctr">
               <a:lnSpc>
-                <a:spcPts val="1140"/>
+                <a:spcPts val="1320"/>
               </a:lnSpc>
             </a:pPr>
             <a:r>
-              <a:rPr sz="869" b="0">
+              <a:rPr sz="1019" b="0">
                 <a:solidFill>
                   <a:srgbClr val="3F4E61"/>
                 </a:solidFill>
@@ -12455,17 +12455,17 @@
                 <a:ea typeface="Pretendard"/>
                 <a:cs typeface="Pretendard"/>
               </a:rPr>
-              <a:t>관리 테이블 · 작업 상태 기계</a:t>
+              <a:t>관리 테이블 · 상태 기계</a:t>
             </a:r>
           </a:p>
           <a:p>
             <a:pPr algn="ctr">
               <a:lnSpc>
-                <a:spcPts val="1140"/>
+                <a:spcPts val="1320"/>
               </a:lnSpc>
             </a:pPr>
             <a:r>
-              <a:rPr sz="869" b="0">
+              <a:rPr sz="1019" b="0">
                 <a:solidFill>
                   <a:srgbClr val="3F4E61"/>
                 </a:solidFill>
@@ -12473,7 +12473,7 @@
                 <a:ea typeface="Pretendard"/>
                 <a:cs typeface="Pretendard"/>
               </a:rPr>
-              <a:t>pg_advisory_lock 동시 실행 방지</a:t>
+              <a:t>pg_advisory_lock 잠금</a:t>
             </a:r>
           </a:p>
         </p:txBody>
@@ -12486,7 +12486,7 @@
         </p:nvSpPr>
         <p:spPr>
           <a:xfrm>
-            <a:off x="8007350" y="3619500"/>
+            <a:off x="8007350" y="3802380"/>
             <a:ext cx="254000" cy="228600"/>
           </a:xfrm>
           <a:custGeom>
@@ -12649,7 +12649,7 @@
             </a:pathLst>
           </a:custGeom>
           <a:solidFill>
-            <a:srgbClr val="164B8C"/>
+            <a:srgbClr val="1F4E8C"/>
           </a:solidFill>
           <a:ln>
             <a:noFill/>
@@ -12671,38 +12671,38 @@
         </p:nvSpPr>
         <p:spPr>
           <a:xfrm>
-            <a:off x="9410700" y="3543300"/>
-            <a:ext cx="2247900" cy="929640"/>
+            <a:off x="9410700" y="3703320"/>
+            <a:ext cx="2247900" cy="1036320"/>
           </a:xfrm>
           <a:prstGeom prst="roundRect">
             <a:avLst>
-              <a:gd name="adj" fmla="val 9836"/>
+              <a:gd name="adj" fmla="val 8823"/>
             </a:avLst>
           </a:prstGeom>
           <a:solidFill>
             <a:srgbClr val="FFFFFF"/>
           </a:solidFill>
-          <a:ln w="12192">
+          <a:ln w="13716">
             <a:solidFill>
-              <a:srgbClr val="6F9BD1"/>
+              <a:srgbClr val="8EC3EC"/>
             </a:solidFill>
           </a:ln>
         </p:spPr>
         <p:txBody>
-          <a:bodyPr rtlCol="0" anchor="t" lIns="45720" tIns="388620" rIns="45720" bIns="0" wrap="none">
+          <a:bodyPr rtlCol="0" anchor="t" lIns="45720" tIns="411480" rIns="45720" bIns="0" wrap="none">
             <a:noAutofit/>
           </a:bodyPr>
           <a:lstStyle/>
           <a:p>
             <a:pPr algn="ctr">
               <a:lnSpc>
-                <a:spcPts val="1439"/>
+                <a:spcPts val="1560"/>
               </a:lnSpc>
             </a:pPr>
             <a:r>
-              <a:rPr sz="1140" b="1">
+              <a:rPr sz="1200" b="1">
                 <a:solidFill>
-                  <a:srgbClr val="0A2342"/>
+                  <a:srgbClr val="0B2545"/>
                 </a:solidFill>
                 <a:latin typeface="Pretendard"/>
                 <a:ea typeface="Pretendard"/>
@@ -12714,11 +12714,11 @@
           <a:p>
             <a:pPr algn="ctr">
               <a:lnSpc>
-                <a:spcPts val="1140"/>
+                <a:spcPts val="1320"/>
               </a:lnSpc>
             </a:pPr>
             <a:r>
-              <a:rPr sz="869" b="0">
+              <a:rPr sz="1019" b="0">
                 <a:solidFill>
                   <a:srgbClr val="3F4E61"/>
                 </a:solidFill>
@@ -12732,11 +12732,11 @@
           <a:p>
             <a:pPr algn="ctr">
               <a:lnSpc>
-                <a:spcPts val="1140"/>
+                <a:spcPts val="1320"/>
               </a:lnSpc>
             </a:pPr>
             <a:r>
-              <a:rPr sz="869" b="0">
+              <a:rPr sz="1019" b="0">
                 <a:solidFill>
                   <a:srgbClr val="3F4E61"/>
                 </a:solidFill>
@@ -12757,7 +12757,7 @@
         </p:nvSpPr>
         <p:spPr>
           <a:xfrm>
-            <a:off x="10407650" y="3606800"/>
+            <a:off x="10407650" y="3789680"/>
             <a:ext cx="254000" cy="254000"/>
           </a:xfrm>
           <a:custGeom>
@@ -13445,7 +13445,7 @@
                   <a:pt x="163690" y="192332"/>
                 </a:lnTo>
                 <a:lnTo>
-                  <a:pt x="165259" y="191452"/>
+                  <a:pt x="165259" y="191453"/>
                 </a:lnTo>
                 <a:lnTo>
                   <a:pt x="166808" y="190537"/>
@@ -13994,7 +13994,7 @@
                   <a:pt x="87192" y="190537"/>
                 </a:lnTo>
                 <a:lnTo>
-                  <a:pt x="88741" y="191452"/>
+                  <a:pt x="88741" y="191453"/>
                 </a:lnTo>
                 <a:lnTo>
                   <a:pt x="90310" y="192332"/>
@@ -14332,7 +14332,7 @@
             </a:pathLst>
           </a:custGeom>
           <a:solidFill>
-            <a:srgbClr val="164B8C"/>
+            <a:srgbClr val="1F4E8C"/>
           </a:solidFill>
           <a:ln>
             <a:noFill/>
@@ -14354,38 +14354,38 @@
         </p:nvSpPr>
         <p:spPr>
           <a:xfrm>
-            <a:off x="2209800" y="4869180"/>
-            <a:ext cx="1790700" cy="929640"/>
+            <a:off x="2209800" y="5044440"/>
+            <a:ext cx="1790700" cy="1036320"/>
           </a:xfrm>
           <a:prstGeom prst="roundRect">
             <a:avLst>
-              <a:gd name="adj" fmla="val 9836"/>
+              <a:gd name="adj" fmla="val 8823"/>
             </a:avLst>
           </a:prstGeom>
           <a:solidFill>
             <a:srgbClr val="FFFFFF"/>
           </a:solidFill>
-          <a:ln w="12192">
+          <a:ln w="13716">
             <a:solidFill>
-              <a:srgbClr val="6F9BD1"/>
+              <a:srgbClr val="8EC3EC"/>
             </a:solidFill>
           </a:ln>
         </p:spPr>
         <p:txBody>
-          <a:bodyPr rtlCol="0" anchor="t" lIns="45720" tIns="388620" rIns="45720" bIns="0" wrap="none">
+          <a:bodyPr rtlCol="0" anchor="t" lIns="45720" tIns="411480" rIns="45720" bIns="0" wrap="none">
             <a:noAutofit/>
           </a:bodyPr>
           <a:lstStyle/>
           <a:p>
             <a:pPr algn="ctr">
               <a:lnSpc>
-                <a:spcPts val="1439"/>
+                <a:spcPts val="1560"/>
               </a:lnSpc>
             </a:pPr>
             <a:r>
-              <a:rPr sz="1140" b="1">
+              <a:rPr sz="1200" b="1">
                 <a:solidFill>
-                  <a:srgbClr val="0A2342"/>
+                  <a:srgbClr val="0B2545"/>
                 </a:solidFill>
                 <a:latin typeface="Pretendard"/>
                 <a:ea typeface="Pretendard"/>
@@ -14397,11 +14397,11 @@
           <a:p>
             <a:pPr algn="ctr">
               <a:lnSpc>
-                <a:spcPts val="1140"/>
+                <a:spcPts val="1320"/>
               </a:lnSpc>
             </a:pPr>
             <a:r>
-              <a:rPr sz="869" b="0">
+              <a:rPr sz="1019" b="0">
                 <a:solidFill>
                   <a:srgbClr val="3F4E61"/>
                 </a:solidFill>
@@ -14415,11 +14415,11 @@
           <a:p>
             <a:pPr algn="ctr">
               <a:lnSpc>
-                <a:spcPts val="1140"/>
+                <a:spcPts val="1320"/>
               </a:lnSpc>
             </a:pPr>
             <a:r>
-              <a:rPr sz="869" b="0">
+              <a:rPr sz="1019" b="0">
                 <a:solidFill>
                   <a:srgbClr val="3F4E61"/>
                 </a:solidFill>
@@ -14440,7 +14440,7 @@
         </p:nvSpPr>
         <p:spPr>
           <a:xfrm>
-            <a:off x="2990850" y="4931728"/>
+            <a:off x="2990850" y="5129848"/>
             <a:ext cx="228600" cy="255904"/>
           </a:xfrm>
           <a:custGeom>
@@ -14973,7 +14973,7 @@
             </a:pathLst>
           </a:custGeom>
           <a:solidFill>
-            <a:srgbClr val="164B8C"/>
+            <a:srgbClr val="1F4E8C"/>
           </a:solidFill>
           <a:ln>
             <a:noFill/>
@@ -14995,38 +14995,38 @@
         </p:nvSpPr>
         <p:spPr>
           <a:xfrm>
-            <a:off x="4122420" y="4869180"/>
-            <a:ext cx="1790700" cy="929640"/>
+            <a:off x="4122420" y="5044440"/>
+            <a:ext cx="1790700" cy="1036320"/>
           </a:xfrm>
           <a:prstGeom prst="roundRect">
             <a:avLst>
-              <a:gd name="adj" fmla="val 9836"/>
+              <a:gd name="adj" fmla="val 8823"/>
             </a:avLst>
           </a:prstGeom>
           <a:solidFill>
             <a:srgbClr val="FFFFFF"/>
           </a:solidFill>
-          <a:ln w="12192">
+          <a:ln w="13716">
             <a:solidFill>
-              <a:srgbClr val="6F9BD1"/>
+              <a:srgbClr val="8EC3EC"/>
             </a:solidFill>
           </a:ln>
         </p:spPr>
         <p:txBody>
-          <a:bodyPr rtlCol="0" anchor="t" lIns="45720" tIns="388620" rIns="45720" bIns="0" wrap="none">
+          <a:bodyPr rtlCol="0" anchor="t" lIns="45720" tIns="411480" rIns="45720" bIns="0" wrap="none">
             <a:noAutofit/>
           </a:bodyPr>
           <a:lstStyle/>
           <a:p>
             <a:pPr algn="ctr">
               <a:lnSpc>
-                <a:spcPts val="1439"/>
+                <a:spcPts val="1560"/>
               </a:lnSpc>
             </a:pPr>
             <a:r>
-              <a:rPr sz="1140" b="1">
+              <a:rPr sz="1200" b="1">
                 <a:solidFill>
-                  <a:srgbClr val="0A2342"/>
+                  <a:srgbClr val="0B2545"/>
                 </a:solidFill>
                 <a:latin typeface="Pretendard"/>
                 <a:ea typeface="Pretendard"/>
@@ -15038,11 +15038,11 @@
           <a:p>
             <a:pPr algn="ctr">
               <a:lnSpc>
-                <a:spcPts val="1140"/>
+                <a:spcPts val="1320"/>
               </a:lnSpc>
             </a:pPr>
             <a:r>
-              <a:rPr sz="869" b="0">
+              <a:rPr sz="1019" b="0">
                 <a:solidFill>
                   <a:srgbClr val="3F4E61"/>
                 </a:solidFill>
@@ -15056,11 +15056,11 @@
           <a:p>
             <a:pPr algn="ctr">
               <a:lnSpc>
-                <a:spcPts val="1140"/>
+                <a:spcPts val="1320"/>
               </a:lnSpc>
             </a:pPr>
             <a:r>
-              <a:rPr sz="869" b="0">
+              <a:rPr sz="1019" b="0">
                 <a:solidFill>
                   <a:srgbClr val="3F4E61"/>
                 </a:solidFill>
@@ -15081,7 +15081,7 @@
         </p:nvSpPr>
         <p:spPr>
           <a:xfrm>
-            <a:off x="4903470" y="4921568"/>
+            <a:off x="4903470" y="5119688"/>
             <a:ext cx="242252" cy="252412"/>
           </a:xfrm>
           <a:custGeom>
@@ -16310,7 +16310,7 @@
             </a:pathLst>
           </a:custGeom>
           <a:solidFill>
-            <a:srgbClr val="164B8C"/>
+            <a:srgbClr val="1F4E8C"/>
           </a:solidFill>
           <a:ln>
             <a:noFill/>
@@ -16332,38 +16332,38 @@
         </p:nvSpPr>
         <p:spPr>
           <a:xfrm>
-            <a:off x="6035040" y="4869180"/>
-            <a:ext cx="1790700" cy="929640"/>
+            <a:off x="6035040" y="5044440"/>
+            <a:ext cx="1790700" cy="1036320"/>
           </a:xfrm>
           <a:prstGeom prst="roundRect">
             <a:avLst>
-              <a:gd name="adj" fmla="val 9836"/>
+              <a:gd name="adj" fmla="val 8823"/>
             </a:avLst>
           </a:prstGeom>
           <a:solidFill>
             <a:srgbClr val="FFFFFF"/>
           </a:solidFill>
-          <a:ln w="12192">
+          <a:ln w="13716">
             <a:solidFill>
-              <a:srgbClr val="6F9BD1"/>
+              <a:srgbClr val="8EC3EC"/>
             </a:solidFill>
           </a:ln>
         </p:spPr>
         <p:txBody>
-          <a:bodyPr rtlCol="0" anchor="t" lIns="45720" tIns="388620" rIns="45720" bIns="0" wrap="none">
+          <a:bodyPr rtlCol="0" anchor="t" lIns="45720" tIns="411480" rIns="45720" bIns="0" wrap="none">
             <a:noAutofit/>
           </a:bodyPr>
           <a:lstStyle/>
           <a:p>
             <a:pPr algn="ctr">
               <a:lnSpc>
-                <a:spcPts val="1439"/>
+                <a:spcPts val="1560"/>
               </a:lnSpc>
             </a:pPr>
             <a:r>
-              <a:rPr sz="1140" b="1">
+              <a:rPr sz="1200" b="1">
                 <a:solidFill>
-                  <a:srgbClr val="0A2342"/>
+                  <a:srgbClr val="0B2545"/>
                 </a:solidFill>
                 <a:latin typeface="Pretendard"/>
                 <a:ea typeface="Pretendard"/>
@@ -16375,11 +16375,11 @@
           <a:p>
             <a:pPr algn="ctr">
               <a:lnSpc>
-                <a:spcPts val="1140"/>
+                <a:spcPts val="1320"/>
               </a:lnSpc>
             </a:pPr>
             <a:r>
-              <a:rPr sz="869" b="0">
+              <a:rPr sz="1019" b="0">
                 <a:solidFill>
                   <a:srgbClr val="3F4E61"/>
                 </a:solidFill>
@@ -16393,11 +16393,11 @@
           <a:p>
             <a:pPr algn="ctr">
               <a:lnSpc>
-                <a:spcPts val="1140"/>
+                <a:spcPts val="1320"/>
               </a:lnSpc>
             </a:pPr>
             <a:r>
-              <a:rPr sz="869" b="0">
+              <a:rPr sz="1019" b="0">
                 <a:solidFill>
                   <a:srgbClr val="3F4E61"/>
                 </a:solidFill>
@@ -16418,7 +16418,7 @@
         </p:nvSpPr>
         <p:spPr>
           <a:xfrm>
-            <a:off x="6816090" y="4945380"/>
+            <a:off x="6816090" y="5143500"/>
             <a:ext cx="228600" cy="228600"/>
           </a:xfrm>
           <a:custGeom>
@@ -17661,7 +17661,7 @@
             </a:pathLst>
           </a:custGeom>
           <a:solidFill>
-            <a:srgbClr val="164B8C"/>
+            <a:srgbClr val="1F4E8C"/>
           </a:solidFill>
           <a:ln>
             <a:noFill/>
@@ -17683,38 +17683,38 @@
         </p:nvSpPr>
         <p:spPr>
           <a:xfrm>
-            <a:off x="7947660" y="4869180"/>
-            <a:ext cx="1790700" cy="929640"/>
+            <a:off x="7947660" y="5044440"/>
+            <a:ext cx="1790700" cy="1036320"/>
           </a:xfrm>
           <a:prstGeom prst="roundRect">
             <a:avLst>
-              <a:gd name="adj" fmla="val 9836"/>
+              <a:gd name="adj" fmla="val 8823"/>
             </a:avLst>
           </a:prstGeom>
           <a:solidFill>
             <a:srgbClr val="FFFFFF"/>
           </a:solidFill>
-          <a:ln w="12192">
+          <a:ln w="13716">
             <a:solidFill>
-              <a:srgbClr val="6F9BD1"/>
+              <a:srgbClr val="8EC3EC"/>
             </a:solidFill>
           </a:ln>
         </p:spPr>
         <p:txBody>
-          <a:bodyPr rtlCol="0" anchor="t" lIns="45720" tIns="461010" rIns="45720" bIns="0" wrap="none">
+          <a:bodyPr rtlCol="0" anchor="t" lIns="45720" tIns="495300" rIns="45720" bIns="0" wrap="none">
             <a:noAutofit/>
           </a:bodyPr>
           <a:lstStyle/>
           <a:p>
             <a:pPr algn="ctr">
               <a:lnSpc>
-                <a:spcPts val="1439"/>
+                <a:spcPts val="1560"/>
               </a:lnSpc>
             </a:pPr>
             <a:r>
-              <a:rPr sz="1140" b="1">
+              <a:rPr sz="1200" b="1">
                 <a:solidFill>
-                  <a:srgbClr val="0A2342"/>
+                  <a:srgbClr val="0B2545"/>
                 </a:solidFill>
                 <a:latin typeface="Pretendard"/>
                 <a:ea typeface="Pretendard"/>
@@ -17726,11 +17726,11 @@
           <a:p>
             <a:pPr algn="ctr">
               <a:lnSpc>
-                <a:spcPts val="1140"/>
+                <a:spcPts val="1320"/>
               </a:lnSpc>
             </a:pPr>
             <a:r>
-              <a:rPr sz="869" b="0">
+              <a:rPr sz="1019" b="0">
                 <a:solidFill>
                   <a:srgbClr val="3F4E61"/>
                 </a:solidFill>
@@ -17751,7 +17751,7 @@
         </p:nvSpPr>
         <p:spPr>
           <a:xfrm>
-            <a:off x="8716010" y="5030470"/>
+            <a:off x="8716010" y="5240020"/>
             <a:ext cx="254000" cy="203200"/>
           </a:xfrm>
           <a:custGeom>
@@ -18124,7 +18124,7 @@
             </a:pathLst>
           </a:custGeom>
           <a:solidFill>
-            <a:srgbClr val="164B8C"/>
+            <a:srgbClr val="1F4E8C"/>
           </a:solidFill>
           <a:ln>
             <a:noFill/>
@@ -18146,38 +18146,38 @@
         </p:nvSpPr>
         <p:spPr>
           <a:xfrm>
-            <a:off x="9860280" y="4869180"/>
-            <a:ext cx="1790700" cy="929640"/>
+            <a:off x="9860280" y="5044440"/>
+            <a:ext cx="1790700" cy="1036320"/>
           </a:xfrm>
           <a:prstGeom prst="roundRect">
             <a:avLst>
-              <a:gd name="adj" fmla="val 9836"/>
+              <a:gd name="adj" fmla="val 8823"/>
             </a:avLst>
           </a:prstGeom>
           <a:solidFill>
             <a:srgbClr val="FFFFFF"/>
           </a:solidFill>
-          <a:ln w="12192">
+          <a:ln w="13716">
             <a:solidFill>
-              <a:srgbClr val="6F9BD1"/>
+              <a:srgbClr val="8EC3EC"/>
             </a:solidFill>
           </a:ln>
         </p:spPr>
         <p:txBody>
-          <a:bodyPr rtlCol="0" anchor="t" lIns="45720" tIns="461010" rIns="45720" bIns="0" wrap="none">
+          <a:bodyPr rtlCol="0" anchor="t" lIns="45720" tIns="495300" rIns="45720" bIns="0" wrap="none">
             <a:noAutofit/>
           </a:bodyPr>
           <a:lstStyle/>
           <a:p>
             <a:pPr algn="ctr">
               <a:lnSpc>
-                <a:spcPts val="1439"/>
+                <a:spcPts val="1560"/>
               </a:lnSpc>
             </a:pPr>
             <a:r>
-              <a:rPr sz="1140" b="1">
+              <a:rPr sz="1200" b="1">
                 <a:solidFill>
-                  <a:srgbClr val="0A2342"/>
+                  <a:srgbClr val="0B2545"/>
                 </a:solidFill>
                 <a:latin typeface="Pretendard"/>
                 <a:ea typeface="Pretendard"/>
@@ -18189,11 +18189,11 @@
           <a:p>
             <a:pPr algn="ctr">
               <a:lnSpc>
-                <a:spcPts val="1140"/>
+                <a:spcPts val="1320"/>
               </a:lnSpc>
             </a:pPr>
             <a:r>
-              <a:rPr sz="869" b="0">
+              <a:rPr sz="1019" b="0">
                 <a:solidFill>
                   <a:srgbClr val="3F4E61"/>
                 </a:solidFill>
@@ -18214,7 +18214,7 @@
         </p:nvSpPr>
         <p:spPr>
           <a:xfrm>
-            <a:off x="10654030" y="5005070"/>
+            <a:off x="10654030" y="5214620"/>
             <a:ext cx="203200" cy="254000"/>
           </a:xfrm>
           <a:custGeom>
@@ -18534,7 +18534,7 @@
             </a:pathLst>
           </a:custGeom>
           <a:solidFill>
-            <a:srgbClr val="164B8C"/>
+            <a:srgbClr val="1F4E8C"/>
           </a:solidFill>
           <a:ln>
             <a:noFill/>
@@ -18559,7 +18559,7 @@
         </p:nvCxnSpPr>
         <p:spPr>
           <a:xfrm>
-            <a:off x="8244840" y="2682240"/>
+            <a:off x="8244840" y="2880360"/>
             <a:ext cx="457200" cy="0"/>
           </a:xfrm>
           <a:prstGeom prst="line">
@@ -18567,7 +18567,7 @@
           </a:prstGeom>
           <a:ln w="16764">
             <a:solidFill>
-              <a:srgbClr val="1F74C4"/>
+              <a:srgbClr val="2B86C9"/>
             </a:solidFill>
             <a:prstDash val="dash"/>
             <a:tailEnd type="triangle" w="med" len="med"/>
@@ -18582,8 +18582,8 @@
         </p:nvSpPr>
         <p:spPr>
           <a:xfrm>
-            <a:off x="369570" y="2827020"/>
-            <a:ext cx="327660" cy="205740"/>
+            <a:off x="365760" y="3002280"/>
+            <a:ext cx="335280" cy="213360"/>
           </a:xfrm>
           <a:prstGeom prst="rect">
             <a:avLst/>
@@ -18598,9 +18598,9 @@
           <a:p>
             <a:pPr algn="ctr"/>
             <a:r>
-              <a:rPr sz="1140" b="1">
+              <a:rPr sz="1200" b="1">
                 <a:solidFill>
-                  <a:srgbClr val="164B8C"/>
+                  <a:srgbClr val="1F4E8C"/>
                 </a:solidFill>
                 <a:latin typeface="Pretendard"/>
                 <a:ea typeface="Pretendard"/>
@@ -18619,8 +18619,8 @@
         </p:nvSpPr>
         <p:spPr>
           <a:xfrm>
-            <a:off x="369570" y="3055620"/>
-            <a:ext cx="327660" cy="205740"/>
+            <a:off x="365760" y="3230880"/>
+            <a:ext cx="335280" cy="213360"/>
           </a:xfrm>
           <a:prstGeom prst="rect">
             <a:avLst/>
@@ -18635,9 +18635,9 @@
           <a:p>
             <a:pPr algn="ctr"/>
             <a:r>
-              <a:rPr sz="1140" b="1">
+              <a:rPr sz="1200" b="1">
                 <a:solidFill>
-                  <a:srgbClr val="164B8C"/>
+                  <a:srgbClr val="1F4E8C"/>
                 </a:solidFill>
                 <a:latin typeface="Pretendard"/>
                 <a:ea typeface="Pretendard"/>
@@ -18656,8 +18656,8 @@
         </p:nvSpPr>
         <p:spPr>
           <a:xfrm>
-            <a:off x="369570" y="3284220"/>
-            <a:ext cx="327660" cy="205740"/>
+            <a:off x="365760" y="3459480"/>
+            <a:ext cx="335280" cy="213360"/>
           </a:xfrm>
           <a:prstGeom prst="rect">
             <a:avLst/>
@@ -18672,9 +18672,9 @@
           <a:p>
             <a:pPr algn="ctr"/>
             <a:r>
-              <a:rPr sz="1140" b="1">
+              <a:rPr sz="1200" b="1">
                 <a:solidFill>
-                  <a:srgbClr val="164B8C"/>
+                  <a:srgbClr val="1F4E8C"/>
                 </a:solidFill>
                 <a:latin typeface="Pretendard"/>
                 <a:ea typeface="Pretendard"/>
@@ -18693,8 +18693,8 @@
         </p:nvSpPr>
         <p:spPr>
           <a:xfrm>
-            <a:off x="369570" y="3512820"/>
-            <a:ext cx="327660" cy="205740"/>
+            <a:off x="365760" y="3688080"/>
+            <a:ext cx="335280" cy="213360"/>
           </a:xfrm>
           <a:prstGeom prst="rect">
             <a:avLst/>
@@ -18709,9 +18709,9 @@
           <a:p>
             <a:pPr algn="ctr"/>
             <a:r>
-              <a:rPr sz="1140" b="1">
+              <a:rPr sz="1200" b="1">
                 <a:solidFill>
-                  <a:srgbClr val="164B8C"/>
+                  <a:srgbClr val="1F4E8C"/>
                 </a:solidFill>
                 <a:latin typeface="Pretendard"/>
                 <a:ea typeface="Pretendard"/>
@@ -18731,7 +18731,7 @@
         <p:spPr>
           <a:xfrm>
             <a:off x="381000" y="6309360"/>
-            <a:ext cx="3442335" cy="396240"/>
+            <a:ext cx="3665601" cy="396240"/>
           </a:xfrm>
           <a:prstGeom prst="roundRect">
             <a:avLst>
@@ -18743,7 +18743,7 @@
           </a:solidFill>
           <a:ln w="10668">
             <a:solidFill>
-              <a:srgbClr val="A9C3E2"/>
+              <a:srgbClr val="8EC3EC"/>
             </a:solidFill>
           </a:ln>
         </p:spPr>
@@ -18779,9 +18779,9 @@
           <a:p>
             <a:pPr algn="l"/>
             <a:r>
-              <a:rPr sz="900" b="1">
+              <a:rPr sz="1019" b="1">
                 <a:solidFill>
-                  <a:srgbClr val="0A2342"/>
+                  <a:srgbClr val="0B2545"/>
                 </a:solidFill>
                 <a:latin typeface="Pretendard"/>
                 <a:ea typeface="Pretendard"/>
@@ -18808,7 +18808,7 @@
           </a:prstGeom>
           <a:ln w="16764">
             <a:solidFill>
-              <a:srgbClr val="164B8C"/>
+              <a:srgbClr val="1F4E8C"/>
             </a:solidFill>
             <a:tailEnd type="triangle" w="med" len="med"/>
           </a:ln>
@@ -18823,7 +18823,7 @@
         <p:spPr>
           <a:xfrm>
             <a:off x="1341120" y="6309360"/>
-            <a:ext cx="786765" cy="396240"/>
+            <a:ext cx="871347" cy="396240"/>
           </a:xfrm>
           <a:prstGeom prst="rect">
             <a:avLst/>
@@ -18838,7 +18838,7 @@
           <a:p>
             <a:pPr algn="l"/>
             <a:r>
-              <a:rPr sz="900" b="1">
+              <a:rPr sz="1019" b="1">
                 <a:solidFill>
                   <a:srgbClr val="16202C"/>
                 </a:solidFill>
@@ -18859,7 +18859,7 @@
         </p:nvCxnSpPr>
         <p:spPr>
           <a:xfrm>
-            <a:off x="2204085" y="6507480"/>
+            <a:off x="2288667" y="6507480"/>
             <a:ext cx="350520" cy="0"/>
           </a:xfrm>
           <a:prstGeom prst="line">
@@ -18867,7 +18867,7 @@
           </a:prstGeom>
           <a:ln w="16764">
             <a:solidFill>
-              <a:srgbClr val="1F74C4"/>
+              <a:srgbClr val="2B86C9"/>
             </a:solidFill>
             <a:prstDash val="dash"/>
             <a:tailEnd type="triangle" w="med" len="med"/>
@@ -18882,8 +18882,8 @@
         </p:nvSpPr>
         <p:spPr>
           <a:xfrm>
-            <a:off x="2630805" y="6309360"/>
-            <a:ext cx="1192530" cy="396240"/>
+            <a:off x="2715387" y="6309360"/>
+            <a:ext cx="1331214" cy="396240"/>
           </a:xfrm>
           <a:prstGeom prst="rect">
             <a:avLst/>
@@ -18898,7 +18898,7 @@
           <a:p>
             <a:pPr algn="l"/>
             <a:r>
-              <a:rPr sz="900" b="1">
+              <a:rPr sz="1019" b="1">
                 <a:solidFill>
                   <a:srgbClr val="16202C"/>
                 </a:solidFill>
@@ -18919,8 +18919,8 @@
         </p:nvSpPr>
         <p:spPr>
           <a:xfrm>
-            <a:off x="6726936" y="6385560"/>
-            <a:ext cx="5084064" cy="167640"/>
+            <a:off x="5702808" y="6347460"/>
+            <a:ext cx="6108192" cy="190500"/>
           </a:xfrm>
           <a:prstGeom prst="rect">
             <a:avLst/>
@@ -18935,7 +18935,7 @@
           <a:p>
             <a:pPr algn="r"/>
             <a:r>
-              <a:rPr sz="840" b="0">
+              <a:rPr sz="1019" b="0">
                 <a:solidFill>
                   <a:srgbClr val="3F4E61"/>
                 </a:solidFill>
@@ -18956,8 +18956,8 @@
         </p:nvSpPr>
         <p:spPr>
           <a:xfrm>
-            <a:off x="6758940" y="6553200"/>
-            <a:ext cx="5052060" cy="167640"/>
+            <a:off x="5741670" y="6537960"/>
+            <a:ext cx="6069330" cy="190500"/>
           </a:xfrm>
           <a:prstGeom prst="rect">
             <a:avLst/>
@@ -18972,7 +18972,7 @@
           <a:p>
             <a:pPr algn="r"/>
             <a:r>
-              <a:rPr sz="840" b="0">
+              <a:rPr sz="1019" b="0">
                 <a:solidFill>
                   <a:srgbClr val="3F4E61"/>
                 </a:solidFill>

--- a/docs/design/dist/d02-sw-architecture.pptx
+++ b/docs/design/dist/d02-sw-architecture.pptx
@@ -3113,7 +3113,7 @@
             </a:avLst>
           </a:prstGeom>
           <a:solidFill>
-            <a:srgbClr val="1F4E8C"/>
+            <a:srgbClr val="1E6B4F"/>
           </a:solidFill>
           <a:ln>
             <a:noFill/>
@@ -3153,7 +3153,7 @@
             <a:r>
               <a:rPr sz="2160" b="1">
                 <a:solidFill>
-                  <a:srgbClr val="0B2545"/>
+                  <a:srgbClr val="0B3D2E"/>
                 </a:solidFill>
                 <a:latin typeface="Pretendard"/>
                 <a:ea typeface="Pretendard"/>
@@ -3255,11 +3255,11 @@
             </a:avLst>
           </a:prstGeom>
           <a:solidFill>
-            <a:srgbClr val="EEF6FD"/>
+            <a:srgbClr val="EEF8F3"/>
           </a:solidFill>
           <a:ln w="10668">
             <a:solidFill>
-              <a:srgbClr val="8EC3EC"/>
+              <a:srgbClr val="9DD3B8"/>
             </a:solidFill>
           </a:ln>
         </p:spPr>
@@ -3277,7 +3277,7 @@
             <a:r>
               <a:rPr sz="1200" b="1">
                 <a:solidFill>
-                  <a:srgbClr val="0B2545"/>
+                  <a:srgbClr val="0B3D2E"/>
                 </a:solidFill>
                 <a:latin typeface="Pretendard"/>
                 <a:ea typeface="Pretendard"/>
@@ -3341,11 +3341,11 @@
             </a:avLst>
           </a:prstGeom>
           <a:solidFill>
-            <a:srgbClr val="EEF6FD"/>
+            <a:srgbClr val="EEF8F3"/>
           </a:solidFill>
           <a:ln w="15240">
             <a:solidFill>
-              <a:srgbClr val="1F4E8C"/>
+              <a:srgbClr val="1E6B4F"/>
             </a:solidFill>
           </a:ln>
         </p:spPr>
@@ -3363,7 +3363,7 @@
             <a:r>
               <a:rPr sz="1200" b="1">
                 <a:solidFill>
-                  <a:srgbClr val="0B2545"/>
+                  <a:srgbClr val="0B3D2E"/>
                 </a:solidFill>
                 <a:latin typeface="Pretendard"/>
                 <a:ea typeface="Pretendard"/>
@@ -3427,11 +3427,11 @@
             </a:avLst>
           </a:prstGeom>
           <a:solidFill>
-            <a:srgbClr val="EEF6FD"/>
+            <a:srgbClr val="EEF8F3"/>
           </a:solidFill>
           <a:ln w="10668">
             <a:solidFill>
-              <a:srgbClr val="8EC3EC"/>
+              <a:srgbClr val="9DD3B8"/>
             </a:solidFill>
           </a:ln>
         </p:spPr>
@@ -3449,7 +3449,7 @@
             <a:r>
               <a:rPr sz="1200" b="1">
                 <a:solidFill>
-                  <a:srgbClr val="0B2545"/>
+                  <a:srgbClr val="0B3D2E"/>
                 </a:solidFill>
                 <a:latin typeface="Pretendard"/>
                 <a:ea typeface="Pretendard"/>
@@ -3513,11 +3513,11 @@
             </a:avLst>
           </a:prstGeom>
           <a:solidFill>
-            <a:srgbClr val="EEF6FD"/>
+            <a:srgbClr val="EEF8F3"/>
           </a:solidFill>
           <a:ln w="10668">
             <a:solidFill>
-              <a:srgbClr val="8EC3EC"/>
+              <a:srgbClr val="9DD3B8"/>
             </a:solidFill>
           </a:ln>
         </p:spPr>
@@ -3535,7 +3535,7 @@
             <a:r>
               <a:rPr sz="1200" b="1">
                 <a:solidFill>
-                  <a:srgbClr val="0B2545"/>
+                  <a:srgbClr val="0B3D2E"/>
                 </a:solidFill>
                 <a:latin typeface="Pretendard"/>
                 <a:ea typeface="Pretendard"/>
@@ -3598,7 +3598,7 @@
           </a:prstGeom>
           <a:ln w="18288">
             <a:solidFill>
-              <a:srgbClr val="1F4E8C"/>
+              <a:srgbClr val="1E6B4F"/>
             </a:solidFill>
           </a:ln>
         </p:spPr>
@@ -3619,7 +3619,7 @@
           </a:prstGeom>
           <a:ln w="18288">
             <a:solidFill>
-              <a:srgbClr val="1F4E8C"/>
+              <a:srgbClr val="1E6B4F"/>
             </a:solidFill>
             <a:tailEnd type="triangle" w="med" len="med"/>
           </a:ln>
@@ -3646,7 +3646,7 @@
           </a:solidFill>
           <a:ln w="13716">
             <a:solidFill>
-              <a:srgbClr val="8EC3EC"/>
+              <a:srgbClr val="9DD3B8"/>
             </a:solidFill>
           </a:ln>
         </p:spPr>
@@ -3664,7 +3664,7 @@
             <a:r>
               <a:rPr sz="1200" b="1">
                 <a:solidFill>
-                  <a:srgbClr val="0B2545"/>
+                  <a:srgbClr val="0B3D2E"/>
                 </a:solidFill>
                 <a:latin typeface="Pretendard"/>
                 <a:ea typeface="Pretendard"/>
@@ -4236,7 +4236,7 @@
             </a:pathLst>
           </a:custGeom>
           <a:solidFill>
-            <a:srgbClr val="1F4E8C"/>
+            <a:srgbClr val="1E6B4F"/>
           </a:solidFill>
           <a:ln>
             <a:noFill/>
@@ -4271,7 +4271,7 @@
           </a:solidFill>
           <a:ln w="13716">
             <a:solidFill>
-              <a:srgbClr val="8EC3EC"/>
+              <a:srgbClr val="9DD3B8"/>
             </a:solidFill>
           </a:ln>
         </p:spPr>
@@ -4289,7 +4289,7 @@
             <a:r>
               <a:rPr sz="1200" b="1">
                 <a:solidFill>
-                  <a:srgbClr val="0B2545"/>
+                  <a:srgbClr val="0B3D2E"/>
                 </a:solidFill>
                 <a:latin typeface="Pretendard"/>
                 <a:ea typeface="Pretendard"/>
@@ -4717,7 +4717,7 @@
             </a:pathLst>
           </a:custGeom>
           <a:solidFill>
-            <a:srgbClr val="1F4E8C"/>
+            <a:srgbClr val="1E6B4F"/>
           </a:solidFill>
           <a:ln>
             <a:noFill/>
@@ -4752,7 +4752,7 @@
           </a:solidFill>
           <a:ln w="13716">
             <a:solidFill>
-              <a:srgbClr val="8EC3EC"/>
+              <a:srgbClr val="9DD3B8"/>
             </a:solidFill>
           </a:ln>
         </p:spPr>
@@ -4770,7 +4770,7 @@
             <a:r>
               <a:rPr sz="1200" b="1">
                 <a:solidFill>
-                  <a:srgbClr val="0B2545"/>
+                  <a:srgbClr val="0B3D2E"/>
                 </a:solidFill>
                 <a:latin typeface="Pretendard"/>
                 <a:ea typeface="Pretendard"/>
@@ -5192,7 +5192,7 @@
             </a:pathLst>
           </a:custGeom>
           <a:solidFill>
-            <a:srgbClr val="1F4E8C"/>
+            <a:srgbClr val="1E6B4F"/>
           </a:solidFill>
           <a:ln>
             <a:noFill/>
@@ -5227,7 +5227,7 @@
           </a:solidFill>
           <a:ln w="13716">
             <a:solidFill>
-              <a:srgbClr val="8EC3EC"/>
+              <a:srgbClr val="9DD3B8"/>
             </a:solidFill>
           </a:ln>
         </p:spPr>
@@ -5245,7 +5245,7 @@
             <a:r>
               <a:rPr sz="1200" b="1">
                 <a:solidFill>
-                  <a:srgbClr val="0B2545"/>
+                  <a:srgbClr val="0B3D2E"/>
                 </a:solidFill>
                 <a:latin typeface="Pretendard"/>
                 <a:ea typeface="Pretendard"/>
@@ -5467,7 +5467,7 @@
             </a:pathLst>
           </a:custGeom>
           <a:solidFill>
-            <a:srgbClr val="1F4E8C"/>
+            <a:srgbClr val="1E6B4F"/>
           </a:solidFill>
           <a:ln>
             <a:noFill/>
@@ -5502,7 +5502,7 @@
           </a:solidFill>
           <a:ln w="13716">
             <a:solidFill>
-              <a:srgbClr val="8EC3EC"/>
+              <a:srgbClr val="9DD3B8"/>
             </a:solidFill>
           </a:ln>
         </p:spPr>
@@ -5520,7 +5520,7 @@
             <a:r>
               <a:rPr sz="1200" b="1">
                 <a:solidFill>
-                  <a:srgbClr val="0B2545"/>
+                  <a:srgbClr val="0B3D2E"/>
                 </a:solidFill>
                 <a:latin typeface="Pretendard"/>
                 <a:ea typeface="Pretendard"/>
@@ -7831,7 +7831,7 @@
             </a:pathLst>
           </a:custGeom>
           <a:solidFill>
-            <a:srgbClr val="1F4E8C"/>
+            <a:srgbClr val="1E6B4F"/>
           </a:solidFill>
           <a:ln>
             <a:noFill/>
@@ -7866,7 +7866,7 @@
           </a:solidFill>
           <a:ln w="13716">
             <a:solidFill>
-              <a:srgbClr val="8EC3EC"/>
+              <a:srgbClr val="9DD3B8"/>
             </a:solidFill>
           </a:ln>
         </p:spPr>
@@ -7884,7 +7884,7 @@
             <a:r>
               <a:rPr sz="1200" b="1">
                 <a:solidFill>
-                  <a:srgbClr val="0B2545"/>
+                  <a:srgbClr val="0B3D2E"/>
                 </a:solidFill>
                 <a:latin typeface="Pretendard"/>
                 <a:ea typeface="Pretendard"/>
@@ -8354,7 +8354,7 @@
             </a:pathLst>
           </a:custGeom>
           <a:solidFill>
-            <a:srgbClr val="1F4E8C"/>
+            <a:srgbClr val="1E6B4F"/>
           </a:solidFill>
           <a:ln>
             <a:noFill/>
@@ -8385,11 +8385,11 @@
             </a:avLst>
           </a:prstGeom>
           <a:solidFill>
-            <a:srgbClr val="0B2545"/>
+            <a:srgbClr val="0B3D2E"/>
           </a:solidFill>
           <a:ln w="18288">
             <a:solidFill>
-              <a:srgbClr val="0B2545"/>
+              <a:srgbClr val="0B3D2E"/>
             </a:solidFill>
           </a:ln>
         </p:spPr>
@@ -9146,11 +9146,11 @@
             </a:avLst>
           </a:prstGeom>
           <a:solidFill>
-            <a:srgbClr val="0B2545"/>
+            <a:srgbClr val="0B3D2E"/>
           </a:solidFill>
           <a:ln w="18288">
             <a:solidFill>
-              <a:srgbClr val="0B2545"/>
+              <a:srgbClr val="0B3D2E"/>
             </a:solidFill>
           </a:ln>
         </p:spPr>
@@ -9993,7 +9993,7 @@
           </a:solidFill>
           <a:ln w="13716">
             <a:solidFill>
-              <a:srgbClr val="8EC3EC"/>
+              <a:srgbClr val="9DD3B8"/>
             </a:solidFill>
           </a:ln>
         </p:spPr>
@@ -10011,7 +10011,7 @@
             <a:r>
               <a:rPr sz="1200" b="1">
                 <a:solidFill>
-                  <a:srgbClr val="0B2545"/>
+                  <a:srgbClr val="0B3D2E"/>
                 </a:solidFill>
                 <a:latin typeface="Pretendard"/>
                 <a:ea typeface="Pretendard"/>
@@ -10143,7 +10143,7 @@
             </a:pathLst>
           </a:custGeom>
           <a:solidFill>
-            <a:srgbClr val="1F4E8C"/>
+            <a:srgbClr val="1E6B4F"/>
           </a:solidFill>
           <a:ln>
             <a:noFill/>
@@ -10178,7 +10178,7 @@
           </a:solidFill>
           <a:ln w="13716">
             <a:solidFill>
-              <a:srgbClr val="8EC3EC"/>
+              <a:srgbClr val="9DD3B8"/>
             </a:solidFill>
           </a:ln>
         </p:spPr>
@@ -10196,7 +10196,7 @@
             <a:r>
               <a:rPr sz="1200" b="1">
                 <a:solidFill>
-                  <a:srgbClr val="0B2545"/>
+                  <a:srgbClr val="0B3D2E"/>
                 </a:solidFill>
                 <a:latin typeface="Pretendard"/>
                 <a:ea typeface="Pretendard"/>
@@ -10979,7 +10979,7 @@
             </a:pathLst>
           </a:custGeom>
           <a:solidFill>
-            <a:srgbClr val="1F4E8C"/>
+            <a:srgbClr val="1E6B4F"/>
           </a:solidFill>
           <a:ln>
             <a:noFill/>
@@ -11014,7 +11014,7 @@
           </a:solidFill>
           <a:ln w="13716">
             <a:solidFill>
-              <a:srgbClr val="8EC3EC"/>
+              <a:srgbClr val="9DD3B8"/>
             </a:solidFill>
           </a:ln>
         </p:spPr>
@@ -11032,7 +11032,7 @@
             <a:r>
               <a:rPr sz="1200" b="1">
                 <a:solidFill>
-                  <a:srgbClr val="0B2545"/>
+                  <a:srgbClr val="0B3D2E"/>
                 </a:solidFill>
                 <a:latin typeface="Pretendard"/>
                 <a:ea typeface="Pretendard"/>
@@ -12378,7 +12378,7 @@
             </a:pathLst>
           </a:custGeom>
           <a:solidFill>
-            <a:srgbClr val="1F4E8C"/>
+            <a:srgbClr val="1E6B4F"/>
           </a:solidFill>
           <a:ln>
             <a:noFill/>
@@ -12413,7 +12413,7 @@
           </a:solidFill>
           <a:ln w="13716">
             <a:solidFill>
-              <a:srgbClr val="8EC3EC"/>
+              <a:srgbClr val="9DD3B8"/>
             </a:solidFill>
           </a:ln>
         </p:spPr>
@@ -12431,7 +12431,7 @@
             <a:r>
               <a:rPr sz="1200" b="1">
                 <a:solidFill>
-                  <a:srgbClr val="0B2545"/>
+                  <a:srgbClr val="0B3D2E"/>
                 </a:solidFill>
                 <a:latin typeface="Pretendard"/>
                 <a:ea typeface="Pretendard"/>
@@ -12649,7 +12649,7 @@
             </a:pathLst>
           </a:custGeom>
           <a:solidFill>
-            <a:srgbClr val="1F4E8C"/>
+            <a:srgbClr val="1E6B4F"/>
           </a:solidFill>
           <a:ln>
             <a:noFill/>
@@ -12684,7 +12684,7 @@
           </a:solidFill>
           <a:ln w="13716">
             <a:solidFill>
-              <a:srgbClr val="8EC3EC"/>
+              <a:srgbClr val="9DD3B8"/>
             </a:solidFill>
           </a:ln>
         </p:spPr>
@@ -12702,7 +12702,7 @@
             <a:r>
               <a:rPr sz="1200" b="1">
                 <a:solidFill>
-                  <a:srgbClr val="0B2545"/>
+                  <a:srgbClr val="0B3D2E"/>
                 </a:solidFill>
                 <a:latin typeface="Pretendard"/>
                 <a:ea typeface="Pretendard"/>
@@ -14332,7 +14332,7 @@
             </a:pathLst>
           </a:custGeom>
           <a:solidFill>
-            <a:srgbClr val="1F4E8C"/>
+            <a:srgbClr val="1E6B4F"/>
           </a:solidFill>
           <a:ln>
             <a:noFill/>
@@ -14367,7 +14367,7 @@
           </a:solidFill>
           <a:ln w="13716">
             <a:solidFill>
-              <a:srgbClr val="8EC3EC"/>
+              <a:srgbClr val="9DD3B8"/>
             </a:solidFill>
           </a:ln>
         </p:spPr>
@@ -14385,7 +14385,7 @@
             <a:r>
               <a:rPr sz="1200" b="1">
                 <a:solidFill>
-                  <a:srgbClr val="0B2545"/>
+                  <a:srgbClr val="0B3D2E"/>
                 </a:solidFill>
                 <a:latin typeface="Pretendard"/>
                 <a:ea typeface="Pretendard"/>
@@ -14973,7 +14973,7 @@
             </a:pathLst>
           </a:custGeom>
           <a:solidFill>
-            <a:srgbClr val="1F4E8C"/>
+            <a:srgbClr val="1E6B4F"/>
           </a:solidFill>
           <a:ln>
             <a:noFill/>
@@ -15008,7 +15008,7 @@
           </a:solidFill>
           <a:ln w="13716">
             <a:solidFill>
-              <a:srgbClr val="8EC3EC"/>
+              <a:srgbClr val="9DD3B8"/>
             </a:solidFill>
           </a:ln>
         </p:spPr>
@@ -15026,7 +15026,7 @@
             <a:r>
               <a:rPr sz="1200" b="1">
                 <a:solidFill>
-                  <a:srgbClr val="0B2545"/>
+                  <a:srgbClr val="0B3D2E"/>
                 </a:solidFill>
                 <a:latin typeface="Pretendard"/>
                 <a:ea typeface="Pretendard"/>
@@ -16310,7 +16310,7 @@
             </a:pathLst>
           </a:custGeom>
           <a:solidFill>
-            <a:srgbClr val="1F4E8C"/>
+            <a:srgbClr val="1E6B4F"/>
           </a:solidFill>
           <a:ln>
             <a:noFill/>
@@ -16345,7 +16345,7 @@
           </a:solidFill>
           <a:ln w="13716">
             <a:solidFill>
-              <a:srgbClr val="8EC3EC"/>
+              <a:srgbClr val="9DD3B8"/>
             </a:solidFill>
           </a:ln>
         </p:spPr>
@@ -16363,7 +16363,7 @@
             <a:r>
               <a:rPr sz="1200" b="1">
                 <a:solidFill>
-                  <a:srgbClr val="0B2545"/>
+                  <a:srgbClr val="0B3D2E"/>
                 </a:solidFill>
                 <a:latin typeface="Pretendard"/>
                 <a:ea typeface="Pretendard"/>
@@ -17661,7 +17661,7 @@
             </a:pathLst>
           </a:custGeom>
           <a:solidFill>
-            <a:srgbClr val="1F4E8C"/>
+            <a:srgbClr val="1E6B4F"/>
           </a:solidFill>
           <a:ln>
             <a:noFill/>
@@ -17696,7 +17696,7 @@
           </a:solidFill>
           <a:ln w="13716">
             <a:solidFill>
-              <a:srgbClr val="8EC3EC"/>
+              <a:srgbClr val="9DD3B8"/>
             </a:solidFill>
           </a:ln>
         </p:spPr>
@@ -17714,7 +17714,7 @@
             <a:r>
               <a:rPr sz="1200" b="1">
                 <a:solidFill>
-                  <a:srgbClr val="0B2545"/>
+                  <a:srgbClr val="0B3D2E"/>
                 </a:solidFill>
                 <a:latin typeface="Pretendard"/>
                 <a:ea typeface="Pretendard"/>
@@ -18124,7 +18124,7 @@
             </a:pathLst>
           </a:custGeom>
           <a:solidFill>
-            <a:srgbClr val="1F4E8C"/>
+            <a:srgbClr val="1E6B4F"/>
           </a:solidFill>
           <a:ln>
             <a:noFill/>
@@ -18159,7 +18159,7 @@
           </a:solidFill>
           <a:ln w="13716">
             <a:solidFill>
-              <a:srgbClr val="8EC3EC"/>
+              <a:srgbClr val="9DD3B8"/>
             </a:solidFill>
           </a:ln>
         </p:spPr>
@@ -18177,7 +18177,7 @@
             <a:r>
               <a:rPr sz="1200" b="1">
                 <a:solidFill>
-                  <a:srgbClr val="0B2545"/>
+                  <a:srgbClr val="0B3D2E"/>
                 </a:solidFill>
                 <a:latin typeface="Pretendard"/>
                 <a:ea typeface="Pretendard"/>
@@ -18534,7 +18534,7 @@
             </a:pathLst>
           </a:custGeom>
           <a:solidFill>
-            <a:srgbClr val="1F4E8C"/>
+            <a:srgbClr val="1E6B4F"/>
           </a:solidFill>
           <a:ln>
             <a:noFill/>
@@ -18567,7 +18567,7 @@
           </a:prstGeom>
           <a:ln w="16764">
             <a:solidFill>
-              <a:srgbClr val="2B86C9"/>
+              <a:srgbClr val="2E9E6E"/>
             </a:solidFill>
             <a:prstDash val="dash"/>
             <a:tailEnd type="triangle" w="med" len="med"/>
@@ -18600,7 +18600,7 @@
             <a:r>
               <a:rPr sz="1200" b="1">
                 <a:solidFill>
-                  <a:srgbClr val="1F4E8C"/>
+                  <a:srgbClr val="1E6B4F"/>
                 </a:solidFill>
                 <a:latin typeface="Pretendard"/>
                 <a:ea typeface="Pretendard"/>
@@ -18637,7 +18637,7 @@
             <a:r>
               <a:rPr sz="1200" b="1">
                 <a:solidFill>
-                  <a:srgbClr val="1F4E8C"/>
+                  <a:srgbClr val="1E6B4F"/>
                 </a:solidFill>
                 <a:latin typeface="Pretendard"/>
                 <a:ea typeface="Pretendard"/>
@@ -18674,7 +18674,7 @@
             <a:r>
               <a:rPr sz="1200" b="1">
                 <a:solidFill>
-                  <a:srgbClr val="1F4E8C"/>
+                  <a:srgbClr val="1E6B4F"/>
                 </a:solidFill>
                 <a:latin typeface="Pretendard"/>
                 <a:ea typeface="Pretendard"/>
@@ -18711,7 +18711,7 @@
             <a:r>
               <a:rPr sz="1200" b="1">
                 <a:solidFill>
-                  <a:srgbClr val="1F4E8C"/>
+                  <a:srgbClr val="1E6B4F"/>
                 </a:solidFill>
                 <a:latin typeface="Pretendard"/>
                 <a:ea typeface="Pretendard"/>
@@ -18743,7 +18743,7 @@
           </a:solidFill>
           <a:ln w="10668">
             <a:solidFill>
-              <a:srgbClr val="8EC3EC"/>
+              <a:srgbClr val="9DD3B8"/>
             </a:solidFill>
           </a:ln>
         </p:spPr>
@@ -18781,7 +18781,7 @@
             <a:r>
               <a:rPr sz="1019" b="1">
                 <a:solidFill>
-                  <a:srgbClr val="0B2545"/>
+                  <a:srgbClr val="0B3D2E"/>
                 </a:solidFill>
                 <a:latin typeface="Pretendard"/>
                 <a:ea typeface="Pretendard"/>
@@ -18808,7 +18808,7 @@
           </a:prstGeom>
           <a:ln w="16764">
             <a:solidFill>
-              <a:srgbClr val="1F4E8C"/>
+              <a:srgbClr val="1E6B4F"/>
             </a:solidFill>
             <a:tailEnd type="triangle" w="med" len="med"/>
           </a:ln>
@@ -18867,7 +18867,7 @@
           </a:prstGeom>
           <a:ln w="16764">
             <a:solidFill>
-              <a:srgbClr val="2B86C9"/>
+              <a:srgbClr val="2E9E6E"/>
             </a:solidFill>
             <a:prstDash val="dash"/>
             <a:tailEnd type="triangle" w="med" len="med"/>

--- a/docs/design/dist/d02-sw-architecture.pptx
+++ b/docs/design/dist/d02-sw-architecture.pptx
@@ -3104,8 +3104,8 @@
         </p:nvSpPr>
         <p:spPr>
           <a:xfrm>
-            <a:off x="381000" y="289560"/>
-            <a:ext cx="53340" cy="335280"/>
+            <a:off x="381000" y="274320"/>
+            <a:ext cx="53340" cy="548640"/>
           </a:xfrm>
           <a:prstGeom prst="roundRect">
             <a:avLst>
@@ -3113,7 +3113,7 @@
             </a:avLst>
           </a:prstGeom>
           <a:solidFill>
-            <a:srgbClr val="164B8C"/>
+            <a:srgbClr val="1E6B4F"/>
           </a:solidFill>
           <a:ln>
             <a:noFill/>
@@ -3135,8 +3135,8 @@
         </p:nvSpPr>
         <p:spPr>
           <a:xfrm>
-            <a:off x="533400" y="289560"/>
-            <a:ext cx="7620000" cy="304800"/>
+            <a:off x="533400" y="228600"/>
+            <a:ext cx="8001000" cy="365760"/>
           </a:xfrm>
           <a:prstGeom prst="rect">
             <a:avLst/>
@@ -3151,9 +3151,9 @@
           <a:p>
             <a:pPr algn="l"/>
             <a:r>
-              <a:rPr sz="1800" b="1">
+              <a:rPr sz="2160" b="1">
                 <a:solidFill>
-                  <a:srgbClr val="0A2342"/>
+                  <a:srgbClr val="0B3D2E"/>
                 </a:solidFill>
                 <a:latin typeface="Pretendard"/>
                 <a:ea typeface="Pretendard"/>
@@ -3172,8 +3172,8 @@
         </p:nvSpPr>
         <p:spPr>
           <a:xfrm>
-            <a:off x="533400" y="624840"/>
-            <a:ext cx="7620000" cy="167640"/>
+            <a:off x="533400" y="640080"/>
+            <a:ext cx="9144000" cy="182880"/>
           </a:xfrm>
           <a:prstGeom prst="rect">
             <a:avLst/>
@@ -3188,7 +3188,7 @@
           <a:p>
             <a:pPr algn="l"/>
             <a:r>
-              <a:rPr sz="960" b="0">
+              <a:rPr sz="1080" b="0">
                 <a:solidFill>
                   <a:srgbClr val="3F4E61"/>
                 </a:solidFill>
@@ -3209,8 +3209,8 @@
         </p:nvSpPr>
         <p:spPr>
           <a:xfrm>
-            <a:off x="8763000" y="426720"/>
-            <a:ext cx="3048000" cy="152400"/>
+            <a:off x="8382000" y="411480"/>
+            <a:ext cx="3429000" cy="167640"/>
           </a:xfrm>
           <a:prstGeom prst="rect">
             <a:avLst/>
@@ -3225,7 +3225,7 @@
           <a:p>
             <a:pPr algn="r"/>
             <a:r>
-              <a:rPr sz="840" b="0">
+              <a:rPr sz="1019" b="0">
                 <a:solidFill>
                   <a:srgbClr val="3F4E61"/>
                 </a:solidFill>
@@ -3233,7 +3233,7 @@
                 <a:ea typeface="Pretendard"/>
                 <a:cs typeface="Pretendard"/>
               </a:rPr>
-              <a:t>KDMS-D02 · v0.1 · 2026-10-06</a:t>
+              <a:t>KDMS-D02 · v0.2 · 2026-10-09</a:t>
             </a:r>
           </a:p>
         </p:txBody>
@@ -3246,20 +3246,20 @@
         </p:nvSpPr>
         <p:spPr>
           <a:xfrm>
-            <a:off x="762000" y="853440"/>
-            <a:ext cx="11049000" cy="1112520"/>
+            <a:off x="762000" y="914400"/>
+            <a:ext cx="11049000" cy="1249680"/>
           </a:xfrm>
           <a:prstGeom prst="roundRect">
             <a:avLst>
-              <a:gd name="adj" fmla="val 12328"/>
+              <a:gd name="adj" fmla="val 10975"/>
             </a:avLst>
           </a:prstGeom>
           <a:solidFill>
-            <a:srgbClr val="F1F6FC"/>
+            <a:srgbClr val="EEF8F3"/>
           </a:solidFill>
           <a:ln w="10668">
             <a:solidFill>
-              <a:srgbClr val="A9C3E2"/>
+              <a:srgbClr val="9DD3B8"/>
             </a:solidFill>
           </a:ln>
         </p:spPr>
@@ -3277,7 +3277,7 @@
             <a:r>
               <a:rPr sz="1200" b="1">
                 <a:solidFill>
-                  <a:srgbClr val="0A2342"/>
+                  <a:srgbClr val="0B3D2E"/>
                 </a:solidFill>
                 <a:latin typeface="Pretendard"/>
                 <a:ea typeface="Pretendard"/>
@@ -3289,11 +3289,11 @@
           <a:p>
             <a:pPr algn="l">
               <a:lnSpc>
-                <a:spcPts val="1200"/>
+                <a:spcPts val="1320"/>
               </a:lnSpc>
             </a:pPr>
             <a:r>
-              <a:rPr sz="869" b="0">
+              <a:rPr sz="1019" b="0">
                 <a:solidFill>
                   <a:srgbClr val="3F4E61"/>
                 </a:solidFill>
@@ -3307,11 +3307,11 @@
           <a:p>
             <a:pPr algn="l">
               <a:lnSpc>
-                <a:spcPts val="1200"/>
+                <a:spcPts val="1320"/>
               </a:lnSpc>
             </a:pPr>
             <a:r>
-              <a:rPr sz="869" b="0">
+              <a:rPr sz="1019" b="0">
                 <a:solidFill>
                   <a:srgbClr val="3F4E61"/>
                 </a:solidFill>
@@ -3332,20 +3332,20 @@
         </p:nvSpPr>
         <p:spPr>
           <a:xfrm>
-            <a:off x="762000" y="2072640"/>
-            <a:ext cx="11049000" cy="1219200"/>
+            <a:off x="762000" y="2255520"/>
+            <a:ext cx="11049000" cy="1249680"/>
           </a:xfrm>
           <a:prstGeom prst="roundRect">
             <a:avLst>
-              <a:gd name="adj" fmla="val 11250"/>
+              <a:gd name="adj" fmla="val 10975"/>
             </a:avLst>
           </a:prstGeom>
           <a:solidFill>
-            <a:srgbClr val="E8F1FB"/>
+            <a:srgbClr val="EEF8F3"/>
           </a:solidFill>
           <a:ln w="15240">
             <a:solidFill>
-              <a:srgbClr val="164B8C"/>
+              <a:srgbClr val="1E6B4F"/>
             </a:solidFill>
           </a:ln>
         </p:spPr>
@@ -3363,7 +3363,7 @@
             <a:r>
               <a:rPr sz="1200" b="1">
                 <a:solidFill>
-                  <a:srgbClr val="0A2342"/>
+                  <a:srgbClr val="0B3D2E"/>
                 </a:solidFill>
                 <a:latin typeface="Pretendard"/>
                 <a:ea typeface="Pretendard"/>
@@ -3375,11 +3375,11 @@
           <a:p>
             <a:pPr algn="l">
               <a:lnSpc>
-                <a:spcPts val="1200"/>
+                <a:spcPts val="1320"/>
               </a:lnSpc>
             </a:pPr>
             <a:r>
-              <a:rPr sz="869" b="0">
+              <a:rPr sz="1019" b="0">
                 <a:solidFill>
                   <a:srgbClr val="3F4E61"/>
                 </a:solidFill>
@@ -3393,11 +3393,11 @@
           <a:p>
             <a:pPr algn="l">
               <a:lnSpc>
-                <a:spcPts val="1200"/>
+                <a:spcPts val="1320"/>
               </a:lnSpc>
             </a:pPr>
             <a:r>
-              <a:rPr sz="869" b="0">
+              <a:rPr sz="1019" b="0">
                 <a:solidFill>
                   <a:srgbClr val="3F4E61"/>
                 </a:solidFill>
@@ -3418,20 +3418,20 @@
         </p:nvSpPr>
         <p:spPr>
           <a:xfrm>
-            <a:off x="762000" y="3398520"/>
-            <a:ext cx="11049000" cy="1219200"/>
+            <a:off x="762000" y="3596640"/>
+            <a:ext cx="11049000" cy="1249680"/>
           </a:xfrm>
           <a:prstGeom prst="roundRect">
             <a:avLst>
-              <a:gd name="adj" fmla="val 11250"/>
+              <a:gd name="adj" fmla="val 10975"/>
             </a:avLst>
           </a:prstGeom>
           <a:solidFill>
-            <a:srgbClr val="F1F6FC"/>
+            <a:srgbClr val="EEF8F3"/>
           </a:solidFill>
           <a:ln w="10668">
             <a:solidFill>
-              <a:srgbClr val="A9C3E2"/>
+              <a:srgbClr val="9DD3B8"/>
             </a:solidFill>
           </a:ln>
         </p:spPr>
@@ -3449,7 +3449,7 @@
             <a:r>
               <a:rPr sz="1200" b="1">
                 <a:solidFill>
-                  <a:srgbClr val="0A2342"/>
+                  <a:srgbClr val="0B3D2E"/>
                 </a:solidFill>
                 <a:latin typeface="Pretendard"/>
                 <a:ea typeface="Pretendard"/>
@@ -3461,11 +3461,11 @@
           <a:p>
             <a:pPr algn="l">
               <a:lnSpc>
-                <a:spcPts val="1200"/>
+                <a:spcPts val="1320"/>
               </a:lnSpc>
             </a:pPr>
             <a:r>
-              <a:rPr sz="869" b="0">
+              <a:rPr sz="1019" b="0">
                 <a:solidFill>
                   <a:srgbClr val="3F4E61"/>
                 </a:solidFill>
@@ -3479,11 +3479,11 @@
           <a:p>
             <a:pPr algn="l">
               <a:lnSpc>
-                <a:spcPts val="1200"/>
+                <a:spcPts val="1320"/>
               </a:lnSpc>
             </a:pPr>
             <a:r>
-              <a:rPr sz="869" b="0">
+              <a:rPr sz="1019" b="0">
                 <a:solidFill>
                   <a:srgbClr val="3F4E61"/>
                 </a:solidFill>
@@ -3504,20 +3504,20 @@
         </p:nvSpPr>
         <p:spPr>
           <a:xfrm>
-            <a:off x="762000" y="4724400"/>
-            <a:ext cx="11049000" cy="1219200"/>
+            <a:off x="762000" y="4937760"/>
+            <a:ext cx="11049000" cy="1249680"/>
           </a:xfrm>
           <a:prstGeom prst="roundRect">
             <a:avLst>
-              <a:gd name="adj" fmla="val 11250"/>
+              <a:gd name="adj" fmla="val 10975"/>
             </a:avLst>
           </a:prstGeom>
           <a:solidFill>
-            <a:srgbClr val="F1F6FC"/>
+            <a:srgbClr val="EEF8F3"/>
           </a:solidFill>
           <a:ln w="10668">
             <a:solidFill>
-              <a:srgbClr val="A9C3E2"/>
+              <a:srgbClr val="9DD3B8"/>
             </a:solidFill>
           </a:ln>
         </p:spPr>
@@ -3535,7 +3535,7 @@
             <a:r>
               <a:rPr sz="1200" b="1">
                 <a:solidFill>
-                  <a:srgbClr val="0A2342"/>
+                  <a:srgbClr val="0B3D2E"/>
                 </a:solidFill>
                 <a:latin typeface="Pretendard"/>
                 <a:ea typeface="Pretendard"/>
@@ -3547,11 +3547,11 @@
           <a:p>
             <a:pPr algn="l">
               <a:lnSpc>
-                <a:spcPts val="1200"/>
+                <a:spcPts val="1320"/>
               </a:lnSpc>
             </a:pPr>
             <a:r>
-              <a:rPr sz="869" b="0">
+              <a:rPr sz="1019" b="0">
                 <a:solidFill>
                   <a:srgbClr val="3F4E61"/>
                 </a:solidFill>
@@ -3565,11 +3565,11 @@
           <a:p>
             <a:pPr algn="l">
               <a:lnSpc>
-                <a:spcPts val="1200"/>
+                <a:spcPts val="1320"/>
               </a:lnSpc>
             </a:pPr>
             <a:r>
-              <a:rPr sz="869" b="0">
+              <a:rPr sz="1019" b="0">
                 <a:solidFill>
                   <a:srgbClr val="3F4E61"/>
                 </a:solidFill>
@@ -3590,15 +3590,15 @@
         </p:nvCxnSpPr>
         <p:spPr>
           <a:xfrm>
-            <a:off x="533400" y="914400"/>
-            <a:ext cx="0" cy="1828800"/>
+            <a:off x="533400" y="975360"/>
+            <a:ext cx="0" cy="1935480"/>
           </a:xfrm>
           <a:prstGeom prst="line">
             <a:avLst/>
           </a:prstGeom>
           <a:ln w="18288">
             <a:solidFill>
-              <a:srgbClr val="164B8C"/>
+              <a:srgbClr val="1E6B4F"/>
             </a:solidFill>
           </a:ln>
         </p:spPr>
@@ -3611,7 +3611,7 @@
         </p:nvCxnSpPr>
         <p:spPr>
           <a:xfrm>
-            <a:off x="533400" y="3810000"/>
+            <a:off x="533400" y="4038600"/>
             <a:ext cx="0" cy="2103120"/>
           </a:xfrm>
           <a:prstGeom prst="line">
@@ -3619,7 +3619,7 @@
           </a:prstGeom>
           <a:ln w="18288">
             <a:solidFill>
-              <a:srgbClr val="164B8C"/>
+              <a:srgbClr val="1E6B4F"/>
             </a:solidFill>
             <a:tailEnd type="triangle" w="med" len="med"/>
           </a:ln>
@@ -3633,38 +3633,38 @@
         </p:nvSpPr>
         <p:spPr>
           <a:xfrm>
-            <a:off x="2209800" y="960120"/>
-            <a:ext cx="3048000" cy="899160"/>
+            <a:off x="2209800" y="1021080"/>
+            <a:ext cx="3048000" cy="1036320"/>
           </a:xfrm>
           <a:prstGeom prst="roundRect">
             <a:avLst>
-              <a:gd name="adj" fmla="val 10169"/>
+              <a:gd name="adj" fmla="val 8823"/>
             </a:avLst>
           </a:prstGeom>
           <a:solidFill>
             <a:srgbClr val="FFFFFF"/>
           </a:solidFill>
-          <a:ln w="12192">
+          <a:ln w="13716">
             <a:solidFill>
-              <a:srgbClr val="6F9BD1"/>
+              <a:srgbClr val="9DD3B8"/>
             </a:solidFill>
           </a:ln>
         </p:spPr>
         <p:txBody>
-          <a:bodyPr rtlCol="0" anchor="t" lIns="45720" tIns="373380" rIns="45720" bIns="0" wrap="none">
+          <a:bodyPr rtlCol="0" anchor="t" lIns="45720" tIns="411480" rIns="45720" bIns="0" wrap="none">
             <a:noAutofit/>
           </a:bodyPr>
           <a:lstStyle/>
           <a:p>
             <a:pPr algn="ctr">
               <a:lnSpc>
-                <a:spcPts val="1439"/>
+                <a:spcPts val="1560"/>
               </a:lnSpc>
             </a:pPr>
             <a:r>
-              <a:rPr sz="1140" b="1">
+              <a:rPr sz="1200" b="1">
                 <a:solidFill>
-                  <a:srgbClr val="0A2342"/>
+                  <a:srgbClr val="0B3D2E"/>
                 </a:solidFill>
                 <a:latin typeface="Pretendard"/>
                 <a:ea typeface="Pretendard"/>
@@ -3676,11 +3676,11 @@
           <a:p>
             <a:pPr algn="ctr">
               <a:lnSpc>
-                <a:spcPts val="1140"/>
+                <a:spcPts val="1320"/>
               </a:lnSpc>
             </a:pPr>
             <a:r>
-              <a:rPr sz="869" b="0">
+              <a:rPr sz="1019" b="0">
                 <a:solidFill>
                   <a:srgbClr val="3F4E61"/>
                 </a:solidFill>
@@ -3694,11 +3694,11 @@
           <a:p>
             <a:pPr algn="ctr">
               <a:lnSpc>
-                <a:spcPts val="1140"/>
+                <a:spcPts val="1320"/>
               </a:lnSpc>
             </a:pPr>
             <a:r>
-              <a:rPr sz="869" b="0">
+              <a:rPr sz="1019" b="0">
                 <a:solidFill>
                   <a:srgbClr val="3F4E61"/>
                 </a:solidFill>
@@ -3719,7 +3719,7 @@
         </p:nvSpPr>
         <p:spPr>
           <a:xfrm>
-            <a:off x="3619500" y="1007428"/>
+            <a:off x="3619500" y="1106488"/>
             <a:ext cx="228600" cy="255904"/>
           </a:xfrm>
           <a:custGeom>
@@ -3929,7 +3929,7 @@
                   <a:pt x="9525" y="57467"/>
                 </a:lnTo>
                 <a:lnTo>
-                  <a:pt x="104775" y="2539"/>
+                  <a:pt x="104775" y="2540"/>
                 </a:lnTo>
                 <a:lnTo>
                   <a:pt x="105537" y="2134"/>
@@ -4001,7 +4001,7 @@
                   <a:pt x="123080" y="2134"/>
                 </a:lnTo>
                 <a:lnTo>
-                  <a:pt x="123825" y="2539"/>
+                  <a:pt x="123825" y="2540"/>
                 </a:lnTo>
                 <a:lnTo>
                   <a:pt x="219075" y="57467"/>
@@ -4236,7 +4236,7 @@
             </a:pathLst>
           </a:custGeom>
           <a:solidFill>
-            <a:srgbClr val="164B8C"/>
+            <a:srgbClr val="1E6B4F"/>
           </a:solidFill>
           <a:ln>
             <a:noFill/>
@@ -4258,38 +4258,38 @@
         </p:nvSpPr>
         <p:spPr>
           <a:xfrm>
-            <a:off x="5410200" y="960120"/>
-            <a:ext cx="3048000" cy="899160"/>
+            <a:off x="5410200" y="1021080"/>
+            <a:ext cx="3048000" cy="1036320"/>
           </a:xfrm>
           <a:prstGeom prst="roundRect">
             <a:avLst>
-              <a:gd name="adj" fmla="val 10169"/>
+              <a:gd name="adj" fmla="val 8823"/>
             </a:avLst>
           </a:prstGeom>
           <a:solidFill>
             <a:srgbClr val="FFFFFF"/>
           </a:solidFill>
-          <a:ln w="12192">
+          <a:ln w="13716">
             <a:solidFill>
-              <a:srgbClr val="6F9BD1"/>
+              <a:srgbClr val="9DD3B8"/>
             </a:solidFill>
           </a:ln>
         </p:spPr>
         <p:txBody>
-          <a:bodyPr rtlCol="0" anchor="t" lIns="45720" tIns="373380" rIns="45720" bIns="0" wrap="none">
+          <a:bodyPr rtlCol="0" anchor="t" lIns="45720" tIns="411480" rIns="45720" bIns="0" wrap="none">
             <a:noAutofit/>
           </a:bodyPr>
           <a:lstStyle/>
           <a:p>
             <a:pPr algn="ctr">
               <a:lnSpc>
-                <a:spcPts val="1439"/>
+                <a:spcPts val="1560"/>
               </a:lnSpc>
             </a:pPr>
             <a:r>
-              <a:rPr sz="1140" b="1">
+              <a:rPr sz="1200" b="1">
                 <a:solidFill>
-                  <a:srgbClr val="0A2342"/>
+                  <a:srgbClr val="0B3D2E"/>
                 </a:solidFill>
                 <a:latin typeface="Pretendard"/>
                 <a:ea typeface="Pretendard"/>
@@ -4301,11 +4301,11 @@
           <a:p>
             <a:pPr algn="ctr">
               <a:lnSpc>
-                <a:spcPts val="1140"/>
+                <a:spcPts val="1320"/>
               </a:lnSpc>
             </a:pPr>
             <a:r>
-              <a:rPr sz="869" b="0">
+              <a:rPr sz="1019" b="0">
                 <a:solidFill>
                   <a:srgbClr val="3F4E61"/>
                 </a:solidFill>
@@ -4313,17 +4313,17 @@
                 <a:ea typeface="Pretendard"/>
                 <a:cs typeface="Pretendard"/>
               </a:rPr>
-              <a:t>picocli 명령 · status · init · web</a:t>
+              <a:t>picocli 명령 10개</a:t>
             </a:r>
           </a:p>
           <a:p>
             <a:pPr algn="ctr">
               <a:lnSpc>
-                <a:spcPts val="1140"/>
+                <a:spcPts val="1320"/>
               </a:lnSpc>
             </a:pPr>
             <a:r>
-              <a:rPr sz="869" b="0">
+              <a:rPr sz="1019" b="0">
                 <a:solidFill>
                   <a:srgbClr val="3F4E61"/>
                 </a:solidFill>
@@ -4331,7 +4331,7 @@
                 <a:ea typeface="Pretendard"/>
                 <a:cs typeface="Pretendard"/>
               </a:rPr>
-              <a:t>plan · load · sync · cutover · verify</a:t>
+              <a:t>plan · load · sync · cutover 등</a:t>
             </a:r>
           </a:p>
         </p:txBody>
@@ -4344,7 +4344,7 @@
         </p:nvSpPr>
         <p:spPr>
           <a:xfrm>
-            <a:off x="6807200" y="1033780"/>
+            <a:off x="6807200" y="1132840"/>
             <a:ext cx="254000" cy="203200"/>
           </a:xfrm>
           <a:custGeom>
@@ -4717,7 +4717,7 @@
             </a:pathLst>
           </a:custGeom>
           <a:solidFill>
-            <a:srgbClr val="164B8C"/>
+            <a:srgbClr val="1E6B4F"/>
           </a:solidFill>
           <a:ln>
             <a:noFill/>
@@ -4739,38 +4739,38 @@
         </p:nvSpPr>
         <p:spPr>
           <a:xfrm>
-            <a:off x="8610600" y="960120"/>
-            <a:ext cx="3048000" cy="899160"/>
+            <a:off x="8610600" y="1021080"/>
+            <a:ext cx="3048000" cy="1036320"/>
           </a:xfrm>
           <a:prstGeom prst="roundRect">
             <a:avLst>
-              <a:gd name="adj" fmla="val 10169"/>
+              <a:gd name="adj" fmla="val 8823"/>
             </a:avLst>
           </a:prstGeom>
           <a:solidFill>
             <a:srgbClr val="FFFFFF"/>
           </a:solidFill>
-          <a:ln w="12192">
+          <a:ln w="13716">
             <a:solidFill>
-              <a:srgbClr val="6F9BD1"/>
+              <a:srgbClr val="9DD3B8"/>
             </a:solidFill>
           </a:ln>
         </p:spPr>
         <p:txBody>
-          <a:bodyPr rtlCol="0" anchor="t" lIns="45720" tIns="373380" rIns="45720" bIns="0" wrap="none">
+          <a:bodyPr rtlCol="0" anchor="t" lIns="45720" tIns="411480" rIns="45720" bIns="0" wrap="none">
             <a:noAutofit/>
           </a:bodyPr>
           <a:lstStyle/>
           <a:p>
             <a:pPr algn="ctr">
               <a:lnSpc>
-                <a:spcPts val="1439"/>
+                <a:spcPts val="1560"/>
               </a:lnSpc>
             </a:pPr>
             <a:r>
-              <a:rPr sz="1140" b="1">
+              <a:rPr sz="1200" b="1">
                 <a:solidFill>
-                  <a:srgbClr val="0A2342"/>
+                  <a:srgbClr val="0B3D2E"/>
                 </a:solidFill>
                 <a:latin typeface="Pretendard"/>
                 <a:ea typeface="Pretendard"/>
@@ -4782,11 +4782,11 @@
           <a:p>
             <a:pPr algn="ctr">
               <a:lnSpc>
-                <a:spcPts val="1140"/>
+                <a:spcPts val="1320"/>
               </a:lnSpc>
             </a:pPr>
             <a:r>
-              <a:rPr sz="869" b="0">
+              <a:rPr sz="1019" b="0">
                 <a:solidFill>
                   <a:srgbClr val="3F4E61"/>
                 </a:solidFill>
@@ -4794,17 +4794,17 @@
                 <a:ea typeface="Pretendard"/>
                 <a:cs typeface="Pretendard"/>
               </a:rPr>
-              <a:t>Spring MVC · Thymeleaf · 상태 REST</a:t>
+              <a:t>Spring MVC · Thymeleaf · REST</a:t>
             </a:r>
           </a:p>
           <a:p>
             <a:pPr algn="ctr">
               <a:lnSpc>
-                <a:spcPts val="1140"/>
+                <a:spcPts val="1320"/>
               </a:lnSpc>
             </a:pPr>
             <a:r>
-              <a:rPr sz="869" b="0">
+              <a:rPr sz="1019" b="0">
                 <a:solidFill>
                   <a:srgbClr val="3F4E61"/>
                 </a:solidFill>
@@ -4825,7 +4825,7 @@
         </p:nvSpPr>
         <p:spPr>
           <a:xfrm>
-            <a:off x="10007600" y="1033780"/>
+            <a:off x="10007600" y="1132840"/>
             <a:ext cx="254000" cy="203200"/>
           </a:xfrm>
           <a:custGeom>
@@ -5192,7 +5192,7 @@
             </a:pathLst>
           </a:custGeom>
           <a:solidFill>
-            <a:srgbClr val="164B8C"/>
+            <a:srgbClr val="1E6B4F"/>
           </a:solidFill>
           <a:ln>
             <a:noFill/>
@@ -5214,38 +5214,38 @@
         </p:nvSpPr>
         <p:spPr>
           <a:xfrm>
-            <a:off x="2209800" y="2217420"/>
-            <a:ext cx="1417320" cy="929640"/>
+            <a:off x="2209800" y="2362200"/>
+            <a:ext cx="1417320" cy="1036320"/>
           </a:xfrm>
           <a:prstGeom prst="roundRect">
             <a:avLst>
-              <a:gd name="adj" fmla="val 9836"/>
+              <a:gd name="adj" fmla="val 8823"/>
             </a:avLst>
           </a:prstGeom>
           <a:solidFill>
             <a:srgbClr val="FFFFFF"/>
           </a:solidFill>
-          <a:ln w="12192">
+          <a:ln w="13716">
             <a:solidFill>
-              <a:srgbClr val="6F9BD1"/>
+              <a:srgbClr val="9DD3B8"/>
             </a:solidFill>
           </a:ln>
         </p:spPr>
         <p:txBody>
-          <a:bodyPr rtlCol="0" anchor="t" lIns="45720" tIns="388620" rIns="45720" bIns="0" wrap="none">
+          <a:bodyPr rtlCol="0" anchor="t" lIns="45720" tIns="411480" rIns="45720" bIns="0" wrap="none">
             <a:noAutofit/>
           </a:bodyPr>
           <a:lstStyle/>
           <a:p>
             <a:pPr algn="ctr">
               <a:lnSpc>
-                <a:spcPts val="1439"/>
+                <a:spcPts val="1560"/>
               </a:lnSpc>
             </a:pPr>
             <a:r>
-              <a:rPr sz="1140" b="1">
+              <a:rPr sz="1200" b="1">
                 <a:solidFill>
-                  <a:srgbClr val="0A2342"/>
+                  <a:srgbClr val="0B3D2E"/>
                 </a:solidFill>
                 <a:latin typeface="Pretendard"/>
                 <a:ea typeface="Pretendard"/>
@@ -5257,11 +5257,11 @@
           <a:p>
             <a:pPr algn="ctr">
               <a:lnSpc>
-                <a:spcPts val="1140"/>
+                <a:spcPts val="1320"/>
               </a:lnSpc>
             </a:pPr>
             <a:r>
-              <a:rPr sz="869" b="0">
+              <a:rPr sz="1019" b="0">
                 <a:solidFill>
                   <a:srgbClr val="3F4E61"/>
                 </a:solidFill>
@@ -5275,11 +5275,11 @@
           <a:p>
             <a:pPr algn="ctr">
               <a:lnSpc>
-                <a:spcPts val="1140"/>
+                <a:spcPts val="1320"/>
               </a:lnSpc>
             </a:pPr>
             <a:r>
-              <a:rPr sz="869" b="0">
+              <a:rPr sz="1019" b="0">
                 <a:solidFill>
                   <a:srgbClr val="3F4E61"/>
                 </a:solidFill>
@@ -5300,7 +5300,7 @@
         </p:nvSpPr>
         <p:spPr>
           <a:xfrm>
-            <a:off x="2816860" y="2268220"/>
+            <a:off x="2816860" y="2435860"/>
             <a:ext cx="215900" cy="279400"/>
           </a:xfrm>
           <a:custGeom>
@@ -5467,7 +5467,7 @@
             </a:pathLst>
           </a:custGeom>
           <a:solidFill>
-            <a:srgbClr val="164B8C"/>
+            <a:srgbClr val="1E6B4F"/>
           </a:solidFill>
           <a:ln>
             <a:noFill/>
@@ -5489,38 +5489,38 @@
         </p:nvSpPr>
         <p:spPr>
           <a:xfrm>
-            <a:off x="3749040" y="2217420"/>
-            <a:ext cx="1417320" cy="929640"/>
+            <a:off x="3749040" y="2362200"/>
+            <a:ext cx="1417320" cy="1036320"/>
           </a:xfrm>
           <a:prstGeom prst="roundRect">
             <a:avLst>
-              <a:gd name="adj" fmla="val 9836"/>
+              <a:gd name="adj" fmla="val 8823"/>
             </a:avLst>
           </a:prstGeom>
           <a:solidFill>
             <a:srgbClr val="FFFFFF"/>
           </a:solidFill>
-          <a:ln w="12192">
+          <a:ln w="13716">
             <a:solidFill>
-              <a:srgbClr val="6F9BD1"/>
+              <a:srgbClr val="9DD3B8"/>
             </a:solidFill>
           </a:ln>
         </p:spPr>
         <p:txBody>
-          <a:bodyPr rtlCol="0" anchor="t" lIns="45720" tIns="388620" rIns="45720" bIns="0" wrap="none">
+          <a:bodyPr rtlCol="0" anchor="t" lIns="45720" tIns="411480" rIns="45720" bIns="0" wrap="none">
             <a:noAutofit/>
           </a:bodyPr>
           <a:lstStyle/>
           <a:p>
             <a:pPr algn="ctr">
               <a:lnSpc>
-                <a:spcPts val="1439"/>
+                <a:spcPts val="1560"/>
               </a:lnSpc>
             </a:pPr>
             <a:r>
-              <a:rPr sz="1140" b="1">
+              <a:rPr sz="1200" b="1">
                 <a:solidFill>
-                  <a:srgbClr val="0A2342"/>
+                  <a:srgbClr val="0B3D2E"/>
                 </a:solidFill>
                 <a:latin typeface="Pretendard"/>
                 <a:ea typeface="Pretendard"/>
@@ -5532,11 +5532,11 @@
           <a:p>
             <a:pPr algn="ctr">
               <a:lnSpc>
-                <a:spcPts val="1140"/>
+                <a:spcPts val="1320"/>
               </a:lnSpc>
             </a:pPr>
             <a:r>
-              <a:rPr sz="869" b="0">
+              <a:rPr sz="1019" b="0">
                 <a:solidFill>
                   <a:srgbClr val="3F4E61"/>
                 </a:solidFill>
@@ -5550,11 +5550,11 @@
           <a:p>
             <a:pPr algn="ctr">
               <a:lnSpc>
-                <a:spcPts val="1140"/>
+                <a:spcPts val="1320"/>
               </a:lnSpc>
             </a:pPr>
             <a:r>
-              <a:rPr sz="869" b="0">
+              <a:rPr sz="1019" b="0">
                 <a:solidFill>
                   <a:srgbClr val="3F4E61"/>
                 </a:solidFill>
@@ -5575,7 +5575,7 @@
         </p:nvSpPr>
         <p:spPr>
           <a:xfrm>
-            <a:off x="4343400" y="2293620"/>
+            <a:off x="4343400" y="2461260"/>
             <a:ext cx="254000" cy="254000"/>
           </a:xfrm>
           <a:custGeom>
@@ -7831,7 +7831,7 @@
             </a:pathLst>
           </a:custGeom>
           <a:solidFill>
-            <a:srgbClr val="164B8C"/>
+            <a:srgbClr val="1E6B4F"/>
           </a:solidFill>
           <a:ln>
             <a:noFill/>
@@ -7853,38 +7853,38 @@
         </p:nvSpPr>
         <p:spPr>
           <a:xfrm>
-            <a:off x="5288280" y="2217420"/>
-            <a:ext cx="1417320" cy="929640"/>
+            <a:off x="5288280" y="2362200"/>
+            <a:ext cx="1417320" cy="1036320"/>
           </a:xfrm>
           <a:prstGeom prst="roundRect">
             <a:avLst>
-              <a:gd name="adj" fmla="val 9836"/>
+              <a:gd name="adj" fmla="val 8823"/>
             </a:avLst>
           </a:prstGeom>
           <a:solidFill>
             <a:srgbClr val="FFFFFF"/>
           </a:solidFill>
-          <a:ln w="12192">
+          <a:ln w="13716">
             <a:solidFill>
-              <a:srgbClr val="6F9BD1"/>
+              <a:srgbClr val="9DD3B8"/>
             </a:solidFill>
           </a:ln>
         </p:spPr>
         <p:txBody>
-          <a:bodyPr rtlCol="0" anchor="t" lIns="45720" tIns="388620" rIns="45720" bIns="0" wrap="none">
+          <a:bodyPr rtlCol="0" anchor="t" lIns="45720" tIns="411480" rIns="45720" bIns="0" wrap="none">
             <a:noAutofit/>
           </a:bodyPr>
           <a:lstStyle/>
           <a:p>
             <a:pPr algn="ctr">
               <a:lnSpc>
-                <a:spcPts val="1439"/>
+                <a:spcPts val="1560"/>
               </a:lnSpc>
             </a:pPr>
             <a:r>
-              <a:rPr sz="1140" b="1">
+              <a:rPr sz="1200" b="1">
                 <a:solidFill>
-                  <a:srgbClr val="0A2342"/>
+                  <a:srgbClr val="0B3D2E"/>
                 </a:solidFill>
                 <a:latin typeface="Pretendard"/>
                 <a:ea typeface="Pretendard"/>
@@ -7896,11 +7896,11 @@
           <a:p>
             <a:pPr algn="ctr">
               <a:lnSpc>
-                <a:spcPts val="1140"/>
+                <a:spcPts val="1320"/>
               </a:lnSpc>
             </a:pPr>
             <a:r>
-              <a:rPr sz="869" b="0">
+              <a:rPr sz="1019" b="0">
                 <a:solidFill>
                   <a:srgbClr val="3F4E61"/>
                 </a:solidFill>
@@ -7914,11 +7914,11 @@
           <a:p>
             <a:pPr algn="ctr">
               <a:lnSpc>
-                <a:spcPts val="1140"/>
+                <a:spcPts val="1320"/>
               </a:lnSpc>
             </a:pPr>
             <a:r>
-              <a:rPr sz="869" b="0">
+              <a:rPr sz="1019" b="0">
                 <a:solidFill>
                   <a:srgbClr val="3F4E61"/>
                 </a:solidFill>
@@ -7939,7 +7939,7 @@
         </p:nvSpPr>
         <p:spPr>
           <a:xfrm>
-            <a:off x="5867400" y="2293620"/>
+            <a:off x="5867400" y="2461260"/>
             <a:ext cx="259080" cy="228600"/>
           </a:xfrm>
           <a:custGeom>
@@ -8354,7 +8354,7 @@
             </a:pathLst>
           </a:custGeom>
           <a:solidFill>
-            <a:srgbClr val="164B8C"/>
+            <a:srgbClr val="1E6B4F"/>
           </a:solidFill>
           <a:ln>
             <a:noFill/>
@@ -8376,38 +8376,38 @@
         </p:nvSpPr>
         <p:spPr>
           <a:xfrm>
-            <a:off x="6827520" y="2217420"/>
-            <a:ext cx="1417320" cy="929640"/>
+            <a:off x="6827520" y="2362200"/>
+            <a:ext cx="1417320" cy="1036320"/>
           </a:xfrm>
           <a:prstGeom prst="roundRect">
             <a:avLst>
-              <a:gd name="adj" fmla="val 9836"/>
+              <a:gd name="adj" fmla="val 8823"/>
             </a:avLst>
           </a:prstGeom>
           <a:solidFill>
-            <a:srgbClr val="D3E5F8"/>
+            <a:srgbClr val="0B3D2E"/>
           </a:solidFill>
           <a:ln w="18288">
             <a:solidFill>
-              <a:srgbClr val="0F3C78"/>
+              <a:srgbClr val="0B3D2E"/>
             </a:solidFill>
           </a:ln>
         </p:spPr>
         <p:txBody>
-          <a:bodyPr rtlCol="0" anchor="t" lIns="45720" tIns="388620" rIns="45720" bIns="0" wrap="none">
+          <a:bodyPr rtlCol="0" anchor="t" lIns="45720" tIns="411480" rIns="45720" bIns="0" wrap="none">
             <a:noAutofit/>
           </a:bodyPr>
           <a:lstStyle/>
           <a:p>
             <a:pPr algn="ctr">
               <a:lnSpc>
-                <a:spcPts val="1439"/>
+                <a:spcPts val="1560"/>
               </a:lnSpc>
             </a:pPr>
             <a:r>
-              <a:rPr sz="1140" b="1">
+              <a:rPr sz="1200" b="1">
                 <a:solidFill>
-                  <a:srgbClr val="0A2342"/>
+                  <a:srgbClr val="FFFFFF"/>
                 </a:solidFill>
                 <a:latin typeface="Pretendard"/>
                 <a:ea typeface="Pretendard"/>
@@ -8419,13 +8419,13 @@
           <a:p>
             <a:pPr algn="ctr">
               <a:lnSpc>
-                <a:spcPts val="1140"/>
+                <a:spcPts val="1320"/>
               </a:lnSpc>
             </a:pPr>
             <a:r>
-              <a:rPr sz="869" b="0">
+              <a:rPr sz="1019" b="0">
                 <a:solidFill>
-                  <a:srgbClr val="3F4E61"/>
+                  <a:srgbClr val="FFFFFF"/>
                 </a:solidFill>
                 <a:latin typeface="Pretendard"/>
                 <a:ea typeface="Pretendard"/>
@@ -8437,13 +8437,13 @@
           <a:p>
             <a:pPr algn="ctr">
               <a:lnSpc>
-                <a:spcPts val="1140"/>
+                <a:spcPts val="1320"/>
               </a:lnSpc>
             </a:pPr>
             <a:r>
-              <a:rPr sz="869" b="0">
+              <a:rPr sz="1019" b="0">
                 <a:solidFill>
-                  <a:srgbClr val="3F4E61"/>
+                  <a:srgbClr val="FFFFFF"/>
                 </a:solidFill>
                 <a:latin typeface="Pretendard"/>
                 <a:ea typeface="Pretendard"/>
@@ -8462,7 +8462,7 @@
         </p:nvSpPr>
         <p:spPr>
           <a:xfrm>
-            <a:off x="7434580" y="2306320"/>
+            <a:off x="7434580" y="2473960"/>
             <a:ext cx="203200" cy="203200"/>
           </a:xfrm>
           <a:custGeom>
@@ -9115,7 +9115,7 @@
             </a:pathLst>
           </a:custGeom>
           <a:solidFill>
-            <a:srgbClr val="164B8C"/>
+            <a:srgbClr val="FFFFFF"/>
           </a:solidFill>
           <a:ln>
             <a:noFill/>
@@ -9137,38 +9137,38 @@
         </p:nvSpPr>
         <p:spPr>
           <a:xfrm>
-            <a:off x="8702040" y="2217420"/>
-            <a:ext cx="1417320" cy="929640"/>
+            <a:off x="8702040" y="2362200"/>
+            <a:ext cx="1417320" cy="1036320"/>
           </a:xfrm>
           <a:prstGeom prst="roundRect">
             <a:avLst>
-              <a:gd name="adj" fmla="val 9836"/>
+              <a:gd name="adj" fmla="val 8823"/>
             </a:avLst>
           </a:prstGeom>
           <a:solidFill>
-            <a:srgbClr val="D3E5F8"/>
+            <a:srgbClr val="0B3D2E"/>
           </a:solidFill>
           <a:ln w="18288">
             <a:solidFill>
-              <a:srgbClr val="0F3C78"/>
+              <a:srgbClr val="0B3D2E"/>
             </a:solidFill>
           </a:ln>
         </p:spPr>
         <p:txBody>
-          <a:bodyPr rtlCol="0" anchor="t" lIns="45720" tIns="388620" rIns="45720" bIns="0" wrap="none">
+          <a:bodyPr rtlCol="0" anchor="t" lIns="45720" tIns="411480" rIns="45720" bIns="0" wrap="none">
             <a:noAutofit/>
           </a:bodyPr>
           <a:lstStyle/>
           <a:p>
             <a:pPr algn="ctr">
               <a:lnSpc>
-                <a:spcPts val="1439"/>
+                <a:spcPts val="1560"/>
               </a:lnSpc>
             </a:pPr>
             <a:r>
-              <a:rPr sz="1140" b="1">
+              <a:rPr sz="1200" b="1">
                 <a:solidFill>
-                  <a:srgbClr val="0A2342"/>
+                  <a:srgbClr val="FFFFFF"/>
                 </a:solidFill>
                 <a:latin typeface="Pretendard"/>
                 <a:ea typeface="Pretendard"/>
@@ -9180,13 +9180,13 @@
           <a:p>
             <a:pPr algn="ctr">
               <a:lnSpc>
-                <a:spcPts val="1140"/>
+                <a:spcPts val="1320"/>
               </a:lnSpc>
             </a:pPr>
             <a:r>
-              <a:rPr sz="869" b="0">
+              <a:rPr sz="1019" b="0">
                 <a:solidFill>
-                  <a:srgbClr val="3F4E61"/>
+                  <a:srgbClr val="FFFFFF"/>
                 </a:solidFill>
                 <a:latin typeface="Pretendard"/>
                 <a:ea typeface="Pretendard"/>
@@ -9198,13 +9198,13 @@
           <a:p>
             <a:pPr algn="ctr">
               <a:lnSpc>
-                <a:spcPts val="1140"/>
+                <a:spcPts val="1320"/>
               </a:lnSpc>
             </a:pPr>
             <a:r>
-              <a:rPr sz="869" b="0">
+              <a:rPr sz="1019" b="0">
                 <a:solidFill>
-                  <a:srgbClr val="3F4E61"/>
+                  <a:srgbClr val="FFFFFF"/>
                 </a:solidFill>
                 <a:latin typeface="Pretendard"/>
                 <a:ea typeface="Pretendard"/>
@@ -9223,7 +9223,7 @@
         </p:nvSpPr>
         <p:spPr>
           <a:xfrm>
-            <a:off x="9286875" y="2281555"/>
+            <a:off x="9286875" y="2449195"/>
             <a:ext cx="247650" cy="252730"/>
           </a:xfrm>
           <a:custGeom>
@@ -9958,7 +9958,7 @@
             </a:pathLst>
           </a:custGeom>
           <a:solidFill>
-            <a:srgbClr val="164B8C"/>
+            <a:srgbClr val="FFFFFF"/>
           </a:solidFill>
           <a:ln>
             <a:noFill/>
@@ -9980,38 +9980,38 @@
         </p:nvSpPr>
         <p:spPr>
           <a:xfrm>
-            <a:off x="10241280" y="2217420"/>
-            <a:ext cx="1417320" cy="929640"/>
+            <a:off x="10241280" y="2362200"/>
+            <a:ext cx="1417320" cy="1036320"/>
           </a:xfrm>
           <a:prstGeom prst="roundRect">
             <a:avLst>
-              <a:gd name="adj" fmla="val 9836"/>
+              <a:gd name="adj" fmla="val 8823"/>
             </a:avLst>
           </a:prstGeom>
           <a:solidFill>
             <a:srgbClr val="FFFFFF"/>
           </a:solidFill>
-          <a:ln w="12192">
+          <a:ln w="13716">
             <a:solidFill>
-              <a:srgbClr val="6F9BD1"/>
+              <a:srgbClr val="9DD3B8"/>
             </a:solidFill>
           </a:ln>
         </p:spPr>
         <p:txBody>
-          <a:bodyPr rtlCol="0" anchor="t" lIns="45720" tIns="388620" rIns="45720" bIns="0" wrap="none">
+          <a:bodyPr rtlCol="0" anchor="t" lIns="45720" tIns="411480" rIns="45720" bIns="0" wrap="none">
             <a:noAutofit/>
           </a:bodyPr>
           <a:lstStyle/>
           <a:p>
             <a:pPr algn="ctr">
               <a:lnSpc>
-                <a:spcPts val="1439"/>
+                <a:spcPts val="1560"/>
               </a:lnSpc>
             </a:pPr>
             <a:r>
-              <a:rPr sz="1140" b="1">
+              <a:rPr sz="1200" b="1">
                 <a:solidFill>
-                  <a:srgbClr val="0A2342"/>
+                  <a:srgbClr val="0B3D2E"/>
                 </a:solidFill>
                 <a:latin typeface="Pretendard"/>
                 <a:ea typeface="Pretendard"/>
@@ -10023,11 +10023,11 @@
           <a:p>
             <a:pPr algn="ctr">
               <a:lnSpc>
-                <a:spcPts val="1140"/>
+                <a:spcPts val="1320"/>
               </a:lnSpc>
             </a:pPr>
             <a:r>
-              <a:rPr sz="869" b="0">
+              <a:rPr sz="1019" b="0">
                 <a:solidFill>
                   <a:srgbClr val="3F4E61"/>
                 </a:solidFill>
@@ -10041,11 +10041,11 @@
           <a:p>
             <a:pPr algn="ctr">
               <a:lnSpc>
-                <a:spcPts val="1140"/>
+                <a:spcPts val="1320"/>
               </a:lnSpc>
             </a:pPr>
             <a:r>
-              <a:rPr sz="869" b="0">
+              <a:rPr sz="1019" b="0">
                 <a:solidFill>
                   <a:srgbClr val="3F4E61"/>
                 </a:solidFill>
@@ -10066,7 +10066,7 @@
         </p:nvSpPr>
         <p:spPr>
           <a:xfrm>
-            <a:off x="10822940" y="2306320"/>
+            <a:off x="10822940" y="2473960"/>
             <a:ext cx="254000" cy="203200"/>
           </a:xfrm>
           <a:custGeom>
@@ -10143,7 +10143,7 @@
             </a:pathLst>
           </a:custGeom>
           <a:solidFill>
-            <a:srgbClr val="164B8C"/>
+            <a:srgbClr val="1E6B4F"/>
           </a:solidFill>
           <a:ln>
             <a:noFill/>
@@ -10165,38 +10165,38 @@
         </p:nvSpPr>
         <p:spPr>
           <a:xfrm>
-            <a:off x="2209800" y="3543300"/>
-            <a:ext cx="2247900" cy="929640"/>
+            <a:off x="2209800" y="3703320"/>
+            <a:ext cx="2247900" cy="1036320"/>
           </a:xfrm>
           <a:prstGeom prst="roundRect">
             <a:avLst>
-              <a:gd name="adj" fmla="val 9836"/>
+              <a:gd name="adj" fmla="val 8823"/>
             </a:avLst>
           </a:prstGeom>
           <a:solidFill>
             <a:srgbClr val="FFFFFF"/>
           </a:solidFill>
-          <a:ln w="12192">
+          <a:ln w="13716">
             <a:solidFill>
-              <a:srgbClr val="6F9BD1"/>
+              <a:srgbClr val="9DD3B8"/>
             </a:solidFill>
           </a:ln>
         </p:spPr>
         <p:txBody>
-          <a:bodyPr rtlCol="0" anchor="t" lIns="45720" tIns="388620" rIns="45720" bIns="0" wrap="none">
+          <a:bodyPr rtlCol="0" anchor="t" lIns="45720" tIns="411480" rIns="45720" bIns="0" wrap="none">
             <a:noAutofit/>
           </a:bodyPr>
           <a:lstStyle/>
           <a:p>
             <a:pPr algn="ctr">
               <a:lnSpc>
-                <a:spcPts val="1439"/>
+                <a:spcPts val="1560"/>
               </a:lnSpc>
             </a:pPr>
             <a:r>
-              <a:rPr sz="1140" b="1">
+              <a:rPr sz="1200" b="1">
                 <a:solidFill>
-                  <a:srgbClr val="0A2342"/>
+                  <a:srgbClr val="0B3D2E"/>
                 </a:solidFill>
                 <a:latin typeface="Pretendard"/>
                 <a:ea typeface="Pretendard"/>
@@ -10208,11 +10208,11 @@
           <a:p>
             <a:pPr algn="ctr">
               <a:lnSpc>
-                <a:spcPts val="1140"/>
+                <a:spcPts val="1320"/>
               </a:lnSpc>
             </a:pPr>
             <a:r>
-              <a:rPr sz="869" b="0">
+              <a:rPr sz="1019" b="0">
                 <a:solidFill>
                   <a:srgbClr val="3F4E61"/>
                 </a:solidFill>
@@ -10226,11 +10226,11 @@
           <a:p>
             <a:pPr algn="ctr">
               <a:lnSpc>
-                <a:spcPts val="1140"/>
+                <a:spcPts val="1320"/>
               </a:lnSpc>
             </a:pPr>
             <a:r>
-              <a:rPr sz="869" b="0">
+              <a:rPr sz="1019" b="0">
                 <a:solidFill>
                   <a:srgbClr val="3F4E61"/>
                 </a:solidFill>
@@ -10238,7 +10238,7 @@
                 <a:ea typeface="Pretendard"/>
                 <a:cs typeface="Pretendard"/>
               </a:rPr>
-              <a:t>접속 확인 1단계 · 카탈로그 2단계</a:t>
+              <a:t>접속 확인 · 카탈로그</a:t>
             </a:r>
           </a:p>
         </p:txBody>
@@ -10251,7 +10251,7 @@
         </p:nvSpPr>
         <p:spPr>
           <a:xfrm>
-            <a:off x="3206750" y="3657600"/>
+            <a:off x="3206750" y="3840480"/>
             <a:ext cx="254000" cy="165100"/>
           </a:xfrm>
           <a:custGeom>
@@ -10936,7 +10936,7 @@
                   <a:pt x="118824" y="92725"/>
                 </a:lnTo>
                 <a:lnTo>
-                  <a:pt x="120891" y="94932"/>
+                  <a:pt x="120891" y="94933"/>
                 </a:lnTo>
                 <a:lnTo>
                   <a:pt x="123087" y="97012"/>
@@ -10979,7 +10979,7 @@
             </a:pathLst>
           </a:custGeom>
           <a:solidFill>
-            <a:srgbClr val="164B8C"/>
+            <a:srgbClr val="1E6B4F"/>
           </a:solidFill>
           <a:ln>
             <a:noFill/>
@@ -11001,38 +11001,38 @@
         </p:nvSpPr>
         <p:spPr>
           <a:xfrm>
-            <a:off x="4610100" y="3543300"/>
-            <a:ext cx="2247900" cy="929640"/>
+            <a:off x="4610100" y="3703320"/>
+            <a:ext cx="2247900" cy="1036320"/>
           </a:xfrm>
           <a:prstGeom prst="roundRect">
             <a:avLst>
-              <a:gd name="adj" fmla="val 9836"/>
+              <a:gd name="adj" fmla="val 8823"/>
             </a:avLst>
           </a:prstGeom>
           <a:solidFill>
             <a:srgbClr val="FFFFFF"/>
           </a:solidFill>
-          <a:ln w="12192">
+          <a:ln w="13716">
             <a:solidFill>
-              <a:srgbClr val="6F9BD1"/>
+              <a:srgbClr val="9DD3B8"/>
             </a:solidFill>
           </a:ln>
         </p:spPr>
         <p:txBody>
-          <a:bodyPr rtlCol="0" anchor="t" lIns="45720" tIns="388620" rIns="45720" bIns="0" wrap="none">
+          <a:bodyPr rtlCol="0" anchor="t" lIns="45720" tIns="411480" rIns="45720" bIns="0" wrap="none">
             <a:noAutofit/>
           </a:bodyPr>
           <a:lstStyle/>
           <a:p>
             <a:pPr algn="ctr">
               <a:lnSpc>
-                <a:spcPts val="1439"/>
+                <a:spcPts val="1560"/>
               </a:lnSpc>
             </a:pPr>
             <a:r>
-              <a:rPr sz="1140" b="1">
+              <a:rPr sz="1200" b="1">
                 <a:solidFill>
-                  <a:srgbClr val="0A2342"/>
+                  <a:srgbClr val="0B3D2E"/>
                 </a:solidFill>
                 <a:latin typeface="Pretendard"/>
                 <a:ea typeface="Pretendard"/>
@@ -11044,11 +11044,11 @@
           <a:p>
             <a:pPr algn="ctr">
               <a:lnSpc>
-                <a:spcPts val="1140"/>
+                <a:spcPts val="1320"/>
               </a:lnSpc>
             </a:pPr>
             <a:r>
-              <a:rPr sz="869" b="0">
+              <a:rPr sz="1019" b="0">
                 <a:solidFill>
                   <a:srgbClr val="3F4E61"/>
                 </a:solidFill>
@@ -11062,11 +11062,11 @@
           <a:p>
             <a:pPr algn="ctr">
               <a:lnSpc>
-                <a:spcPts val="1140"/>
+                <a:spcPts val="1320"/>
               </a:lnSpc>
             </a:pPr>
             <a:r>
-              <a:rPr sz="869" b="0">
+              <a:rPr sz="1019" b="0">
                 <a:solidFill>
                   <a:srgbClr val="3F4E61"/>
                 </a:solidFill>
@@ -11087,7 +11087,7 @@
         </p:nvSpPr>
         <p:spPr>
           <a:xfrm>
-            <a:off x="5622290" y="3632200"/>
+            <a:off x="5622290" y="3815080"/>
             <a:ext cx="249555" cy="241300"/>
           </a:xfrm>
           <a:custGeom>
@@ -11405,10 +11405,10 @@
                   <a:pt x="53022" y="169545"/>
                 </a:lnTo>
                 <a:lnTo>
-                  <a:pt x="53022" y="132398"/>
-                </a:lnTo>
-                <a:lnTo>
-                  <a:pt x="72072" y="132398"/>
+                  <a:pt x="53022" y="132397"/>
+                </a:lnTo>
+                <a:lnTo>
+                  <a:pt x="72072" y="132397"/>
                 </a:lnTo>
                 <a:lnTo>
                   <a:pt x="72072" y="203200"/>
@@ -11668,7 +11668,7 @@
                   <a:pt x="155646" y="213143"/>
                 </a:lnTo>
                 <a:lnTo>
-                  <a:pt x="154940" y="212408"/>
+                  <a:pt x="154940" y="212407"/>
                 </a:lnTo>
                 <a:lnTo>
                   <a:pt x="141605" y="218758"/>
@@ -11764,10 +11764,10 @@
                   <a:pt x="155646" y="144462"/>
                 </a:lnTo>
                 <a:lnTo>
-                  <a:pt x="156386" y="143828"/>
-                </a:lnTo>
-                <a:lnTo>
-                  <a:pt x="157162" y="143192"/>
+                  <a:pt x="156386" y="143827"/>
+                </a:lnTo>
+                <a:lnTo>
+                  <a:pt x="157162" y="143193"/>
                 </a:lnTo>
                 <a:lnTo>
                   <a:pt x="157974" y="142558"/>
@@ -11782,10 +11782,10 @@
                   <a:pt x="160620" y="140652"/>
                 </a:lnTo>
                 <a:lnTo>
-                  <a:pt x="161572" y="140018"/>
-                </a:lnTo>
-                <a:lnTo>
-                  <a:pt x="162560" y="139382"/>
+                  <a:pt x="161572" y="140017"/>
+                </a:lnTo>
+                <a:lnTo>
+                  <a:pt x="162560" y="139383"/>
                 </a:lnTo>
                 <a:lnTo>
                   <a:pt x="163583" y="138748"/>
@@ -11830,7 +11830,7 @@
                   <a:pt x="177692" y="132093"/>
                 </a:lnTo>
                 <a:lnTo>
-                  <a:pt x="178752" y="131762"/>
+                  <a:pt x="178752" y="131763"/>
                 </a:lnTo>
                 <a:lnTo>
                   <a:pt x="180340" y="116205"/>
@@ -11839,7 +11839,7 @@
                   <a:pt x="199390" y="116205"/>
                 </a:lnTo>
                 <a:lnTo>
-                  <a:pt x="201295" y="131762"/>
+                  <a:pt x="201295" y="131763"/>
                 </a:lnTo>
                 <a:lnTo>
                   <a:pt x="202356" y="132093"/>
@@ -11884,10 +11884,10 @@
                   <a:pt x="216464" y="138748"/>
                 </a:lnTo>
                 <a:lnTo>
-                  <a:pt x="217488" y="139382"/>
-                </a:lnTo>
-                <a:lnTo>
-                  <a:pt x="218475" y="140018"/>
+                  <a:pt x="217488" y="139383"/>
+                </a:lnTo>
+                <a:lnTo>
+                  <a:pt x="218475" y="140017"/>
                 </a:lnTo>
                 <a:lnTo>
                   <a:pt x="219428" y="140652"/>
@@ -11902,10 +11902,10 @@
                   <a:pt x="222074" y="142558"/>
                 </a:lnTo>
                 <a:lnTo>
-                  <a:pt x="222885" y="143192"/>
-                </a:lnTo>
-                <a:lnTo>
-                  <a:pt x="223661" y="143828"/>
+                  <a:pt x="222885" y="143193"/>
+                </a:lnTo>
+                <a:lnTo>
+                  <a:pt x="223661" y="143827"/>
                 </a:lnTo>
                 <a:lnTo>
                   <a:pt x="224402" y="144462"/>
@@ -12001,7 +12001,7 @@
                   <a:pt x="238442" y="218758"/>
                 </a:lnTo>
                 <a:lnTo>
-                  <a:pt x="225108" y="212408"/>
+                  <a:pt x="225108" y="212407"/>
                 </a:lnTo>
                 <a:lnTo>
                   <a:pt x="224402" y="213143"/>
@@ -12179,7 +12179,7 @@
                   <a:pt x="219117" y="164075"/>
                 </a:lnTo>
                 <a:lnTo>
-                  <a:pt x="218158" y="162242"/>
+                  <a:pt x="218158" y="162243"/>
                 </a:lnTo>
                 <a:lnTo>
                   <a:pt x="217071" y="160476"/>
@@ -12275,7 +12275,7 @@
                   <a:pt x="162659" y="160476"/>
                 </a:lnTo>
                 <a:lnTo>
-                  <a:pt x="161572" y="162242"/>
+                  <a:pt x="161572" y="162243"/>
                 </a:lnTo>
                 <a:lnTo>
                   <a:pt x="160613" y="164075"/>
@@ -12378,7 +12378,7 @@
             </a:pathLst>
           </a:custGeom>
           <a:solidFill>
-            <a:srgbClr val="164B8C"/>
+            <a:srgbClr val="1E6B4F"/>
           </a:solidFill>
           <a:ln>
             <a:noFill/>
@@ -12400,38 +12400,38 @@
         </p:nvSpPr>
         <p:spPr>
           <a:xfrm>
-            <a:off x="7010400" y="3543300"/>
-            <a:ext cx="2247900" cy="929640"/>
+            <a:off x="7010400" y="3703320"/>
+            <a:ext cx="2247900" cy="1036320"/>
           </a:xfrm>
           <a:prstGeom prst="roundRect">
             <a:avLst>
-              <a:gd name="adj" fmla="val 9836"/>
+              <a:gd name="adj" fmla="val 8823"/>
             </a:avLst>
           </a:prstGeom>
           <a:solidFill>
             <a:srgbClr val="FFFFFF"/>
           </a:solidFill>
-          <a:ln w="12192">
+          <a:ln w="13716">
             <a:solidFill>
-              <a:srgbClr val="6F9BD1"/>
+              <a:srgbClr val="9DD3B8"/>
             </a:solidFill>
           </a:ln>
         </p:spPr>
         <p:txBody>
-          <a:bodyPr rtlCol="0" anchor="t" lIns="45720" tIns="388620" rIns="45720" bIns="0" wrap="none">
+          <a:bodyPr rtlCol="0" anchor="t" lIns="45720" tIns="411480" rIns="45720" bIns="0" wrap="none">
             <a:noAutofit/>
           </a:bodyPr>
           <a:lstStyle/>
           <a:p>
             <a:pPr algn="ctr">
               <a:lnSpc>
-                <a:spcPts val="1439"/>
+                <a:spcPts val="1560"/>
               </a:lnSpc>
             </a:pPr>
             <a:r>
-              <a:rPr sz="1140" b="1">
+              <a:rPr sz="1200" b="1">
                 <a:solidFill>
-                  <a:srgbClr val="0A2342"/>
+                  <a:srgbClr val="0B3D2E"/>
                 </a:solidFill>
                 <a:latin typeface="Pretendard"/>
                 <a:ea typeface="Pretendard"/>
@@ -12443,11 +12443,11 @@
           <a:p>
             <a:pPr algn="ctr">
               <a:lnSpc>
-                <a:spcPts val="1140"/>
+                <a:spcPts val="1320"/>
               </a:lnSpc>
             </a:pPr>
             <a:r>
-              <a:rPr sz="869" b="0">
+              <a:rPr sz="1019" b="0">
                 <a:solidFill>
                   <a:srgbClr val="3F4E61"/>
                 </a:solidFill>
@@ -12455,17 +12455,17 @@
                 <a:ea typeface="Pretendard"/>
                 <a:cs typeface="Pretendard"/>
               </a:rPr>
-              <a:t>관리 테이블 · 작업 상태 기계</a:t>
+              <a:t>관리 테이블 · 상태 기계</a:t>
             </a:r>
           </a:p>
           <a:p>
             <a:pPr algn="ctr">
               <a:lnSpc>
-                <a:spcPts val="1140"/>
+                <a:spcPts val="1320"/>
               </a:lnSpc>
             </a:pPr>
             <a:r>
-              <a:rPr sz="869" b="0">
+              <a:rPr sz="1019" b="0">
                 <a:solidFill>
                   <a:srgbClr val="3F4E61"/>
                 </a:solidFill>
@@ -12473,7 +12473,7 @@
                 <a:ea typeface="Pretendard"/>
                 <a:cs typeface="Pretendard"/>
               </a:rPr>
-              <a:t>pg_advisory_lock 동시 실행 방지</a:t>
+              <a:t>pg_advisory_lock 잠금</a:t>
             </a:r>
           </a:p>
         </p:txBody>
@@ -12486,7 +12486,7 @@
         </p:nvSpPr>
         <p:spPr>
           <a:xfrm>
-            <a:off x="8007350" y="3619500"/>
+            <a:off x="8007350" y="3802380"/>
             <a:ext cx="254000" cy="228600"/>
           </a:xfrm>
           <a:custGeom>
@@ -12649,7 +12649,7 @@
             </a:pathLst>
           </a:custGeom>
           <a:solidFill>
-            <a:srgbClr val="164B8C"/>
+            <a:srgbClr val="1E6B4F"/>
           </a:solidFill>
           <a:ln>
             <a:noFill/>
@@ -12671,38 +12671,38 @@
         </p:nvSpPr>
         <p:spPr>
           <a:xfrm>
-            <a:off x="9410700" y="3543300"/>
-            <a:ext cx="2247900" cy="929640"/>
+            <a:off x="9410700" y="3703320"/>
+            <a:ext cx="2247900" cy="1036320"/>
           </a:xfrm>
           <a:prstGeom prst="roundRect">
             <a:avLst>
-              <a:gd name="adj" fmla="val 9836"/>
+              <a:gd name="adj" fmla="val 8823"/>
             </a:avLst>
           </a:prstGeom>
           <a:solidFill>
             <a:srgbClr val="FFFFFF"/>
           </a:solidFill>
-          <a:ln w="12192">
+          <a:ln w="13716">
             <a:solidFill>
-              <a:srgbClr val="6F9BD1"/>
+              <a:srgbClr val="9DD3B8"/>
             </a:solidFill>
           </a:ln>
         </p:spPr>
         <p:txBody>
-          <a:bodyPr rtlCol="0" anchor="t" lIns="45720" tIns="388620" rIns="45720" bIns="0" wrap="none">
+          <a:bodyPr rtlCol="0" anchor="t" lIns="45720" tIns="411480" rIns="45720" bIns="0" wrap="none">
             <a:noAutofit/>
           </a:bodyPr>
           <a:lstStyle/>
           <a:p>
             <a:pPr algn="ctr">
               <a:lnSpc>
-                <a:spcPts val="1439"/>
+                <a:spcPts val="1560"/>
               </a:lnSpc>
             </a:pPr>
             <a:r>
-              <a:rPr sz="1140" b="1">
+              <a:rPr sz="1200" b="1">
                 <a:solidFill>
-                  <a:srgbClr val="0A2342"/>
+                  <a:srgbClr val="0B3D2E"/>
                 </a:solidFill>
                 <a:latin typeface="Pretendard"/>
                 <a:ea typeface="Pretendard"/>
@@ -12714,11 +12714,11 @@
           <a:p>
             <a:pPr algn="ctr">
               <a:lnSpc>
-                <a:spcPts val="1140"/>
+                <a:spcPts val="1320"/>
               </a:lnSpc>
             </a:pPr>
             <a:r>
-              <a:rPr sz="869" b="0">
+              <a:rPr sz="1019" b="0">
                 <a:solidFill>
                   <a:srgbClr val="3F4E61"/>
                 </a:solidFill>
@@ -12732,11 +12732,11 @@
           <a:p>
             <a:pPr algn="ctr">
               <a:lnSpc>
-                <a:spcPts val="1140"/>
+                <a:spcPts val="1320"/>
               </a:lnSpc>
             </a:pPr>
             <a:r>
-              <a:rPr sz="869" b="0">
+              <a:rPr sz="1019" b="0">
                 <a:solidFill>
                   <a:srgbClr val="3F4E61"/>
                 </a:solidFill>
@@ -12757,7 +12757,7 @@
         </p:nvSpPr>
         <p:spPr>
           <a:xfrm>
-            <a:off x="10407650" y="3606800"/>
+            <a:off x="10407650" y="3789680"/>
             <a:ext cx="254000" cy="254000"/>
           </a:xfrm>
           <a:custGeom>
@@ -13445,7 +13445,7 @@
                   <a:pt x="163690" y="192332"/>
                 </a:lnTo>
                 <a:lnTo>
-                  <a:pt x="165259" y="191452"/>
+                  <a:pt x="165259" y="191453"/>
                 </a:lnTo>
                 <a:lnTo>
                   <a:pt x="166808" y="190537"/>
@@ -13994,7 +13994,7 @@
                   <a:pt x="87192" y="190537"/>
                 </a:lnTo>
                 <a:lnTo>
-                  <a:pt x="88741" y="191452"/>
+                  <a:pt x="88741" y="191453"/>
                 </a:lnTo>
                 <a:lnTo>
                   <a:pt x="90310" y="192332"/>
@@ -14332,7 +14332,7 @@
             </a:pathLst>
           </a:custGeom>
           <a:solidFill>
-            <a:srgbClr val="164B8C"/>
+            <a:srgbClr val="1E6B4F"/>
           </a:solidFill>
           <a:ln>
             <a:noFill/>
@@ -14354,38 +14354,38 @@
         </p:nvSpPr>
         <p:spPr>
           <a:xfrm>
-            <a:off x="2209800" y="4869180"/>
-            <a:ext cx="1790700" cy="929640"/>
+            <a:off x="2209800" y="5044440"/>
+            <a:ext cx="1790700" cy="1036320"/>
           </a:xfrm>
           <a:prstGeom prst="roundRect">
             <a:avLst>
-              <a:gd name="adj" fmla="val 9836"/>
+              <a:gd name="adj" fmla="val 8823"/>
             </a:avLst>
           </a:prstGeom>
           <a:solidFill>
             <a:srgbClr val="FFFFFF"/>
           </a:solidFill>
-          <a:ln w="12192">
+          <a:ln w="13716">
             <a:solidFill>
-              <a:srgbClr val="6F9BD1"/>
+              <a:srgbClr val="9DD3B8"/>
             </a:solidFill>
           </a:ln>
         </p:spPr>
         <p:txBody>
-          <a:bodyPr rtlCol="0" anchor="t" lIns="45720" tIns="388620" rIns="45720" bIns="0" wrap="none">
+          <a:bodyPr rtlCol="0" anchor="t" lIns="45720" tIns="411480" rIns="45720" bIns="0" wrap="none">
             <a:noAutofit/>
           </a:bodyPr>
           <a:lstStyle/>
           <a:p>
             <a:pPr algn="ctr">
               <a:lnSpc>
-                <a:spcPts val="1439"/>
+                <a:spcPts val="1560"/>
               </a:lnSpc>
             </a:pPr>
             <a:r>
-              <a:rPr sz="1140" b="1">
+              <a:rPr sz="1200" b="1">
                 <a:solidFill>
-                  <a:srgbClr val="0A2342"/>
+                  <a:srgbClr val="0B3D2E"/>
                 </a:solidFill>
                 <a:latin typeface="Pretendard"/>
                 <a:ea typeface="Pretendard"/>
@@ -14397,11 +14397,11 @@
           <a:p>
             <a:pPr algn="ctr">
               <a:lnSpc>
-                <a:spcPts val="1140"/>
+                <a:spcPts val="1320"/>
               </a:lnSpc>
             </a:pPr>
             <a:r>
-              <a:rPr sz="869" b="0">
+              <a:rPr sz="1019" b="0">
                 <a:solidFill>
                   <a:srgbClr val="3F4E61"/>
                 </a:solidFill>
@@ -14415,11 +14415,11 @@
           <a:p>
             <a:pPr algn="ctr">
               <a:lnSpc>
-                <a:spcPts val="1140"/>
+                <a:spcPts val="1320"/>
               </a:lnSpc>
             </a:pPr>
             <a:r>
-              <a:rPr sz="869" b="0">
+              <a:rPr sz="1019" b="0">
                 <a:solidFill>
                   <a:srgbClr val="3F4E61"/>
                 </a:solidFill>
@@ -14440,7 +14440,7 @@
         </p:nvSpPr>
         <p:spPr>
           <a:xfrm>
-            <a:off x="2990850" y="4931728"/>
+            <a:off x="2990850" y="5129848"/>
             <a:ext cx="228600" cy="255904"/>
           </a:xfrm>
           <a:custGeom>
@@ -14973,7 +14973,7 @@
             </a:pathLst>
           </a:custGeom>
           <a:solidFill>
-            <a:srgbClr val="164B8C"/>
+            <a:srgbClr val="1E6B4F"/>
           </a:solidFill>
           <a:ln>
             <a:noFill/>
@@ -14995,38 +14995,38 @@
         </p:nvSpPr>
         <p:spPr>
           <a:xfrm>
-            <a:off x="4122420" y="4869180"/>
-            <a:ext cx="1790700" cy="929640"/>
+            <a:off x="4122420" y="5044440"/>
+            <a:ext cx="1790700" cy="1036320"/>
           </a:xfrm>
           <a:prstGeom prst="roundRect">
             <a:avLst>
-              <a:gd name="adj" fmla="val 9836"/>
+              <a:gd name="adj" fmla="val 8823"/>
             </a:avLst>
           </a:prstGeom>
           <a:solidFill>
             <a:srgbClr val="FFFFFF"/>
           </a:solidFill>
-          <a:ln w="12192">
+          <a:ln w="13716">
             <a:solidFill>
-              <a:srgbClr val="6F9BD1"/>
+              <a:srgbClr val="9DD3B8"/>
             </a:solidFill>
           </a:ln>
         </p:spPr>
         <p:txBody>
-          <a:bodyPr rtlCol="0" anchor="t" lIns="45720" tIns="388620" rIns="45720" bIns="0" wrap="none">
+          <a:bodyPr rtlCol="0" anchor="t" lIns="45720" tIns="411480" rIns="45720" bIns="0" wrap="none">
             <a:noAutofit/>
           </a:bodyPr>
           <a:lstStyle/>
           <a:p>
             <a:pPr algn="ctr">
               <a:lnSpc>
-                <a:spcPts val="1439"/>
+                <a:spcPts val="1560"/>
               </a:lnSpc>
             </a:pPr>
             <a:r>
-              <a:rPr sz="1140" b="1">
+              <a:rPr sz="1200" b="1">
                 <a:solidFill>
-                  <a:srgbClr val="0A2342"/>
+                  <a:srgbClr val="0B3D2E"/>
                 </a:solidFill>
                 <a:latin typeface="Pretendard"/>
                 <a:ea typeface="Pretendard"/>
@@ -15038,11 +15038,11 @@
           <a:p>
             <a:pPr algn="ctr">
               <a:lnSpc>
-                <a:spcPts val="1140"/>
+                <a:spcPts val="1320"/>
               </a:lnSpc>
             </a:pPr>
             <a:r>
-              <a:rPr sz="869" b="0">
+              <a:rPr sz="1019" b="0">
                 <a:solidFill>
                   <a:srgbClr val="3F4E61"/>
                 </a:solidFill>
@@ -15056,11 +15056,11 @@
           <a:p>
             <a:pPr algn="ctr">
               <a:lnSpc>
-                <a:spcPts val="1140"/>
+                <a:spcPts val="1320"/>
               </a:lnSpc>
             </a:pPr>
             <a:r>
-              <a:rPr sz="869" b="0">
+              <a:rPr sz="1019" b="0">
                 <a:solidFill>
                   <a:srgbClr val="3F4E61"/>
                 </a:solidFill>
@@ -15081,7 +15081,7 @@
         </p:nvSpPr>
         <p:spPr>
           <a:xfrm>
-            <a:off x="4903470" y="4921568"/>
+            <a:off x="4903470" y="5119688"/>
             <a:ext cx="242252" cy="252412"/>
           </a:xfrm>
           <a:custGeom>
@@ -16310,7 +16310,7 @@
             </a:pathLst>
           </a:custGeom>
           <a:solidFill>
-            <a:srgbClr val="164B8C"/>
+            <a:srgbClr val="1E6B4F"/>
           </a:solidFill>
           <a:ln>
             <a:noFill/>
@@ -16332,38 +16332,38 @@
         </p:nvSpPr>
         <p:spPr>
           <a:xfrm>
-            <a:off x="6035040" y="4869180"/>
-            <a:ext cx="1790700" cy="929640"/>
+            <a:off x="6035040" y="5044440"/>
+            <a:ext cx="1790700" cy="1036320"/>
           </a:xfrm>
           <a:prstGeom prst="roundRect">
             <a:avLst>
-              <a:gd name="adj" fmla="val 9836"/>
+              <a:gd name="adj" fmla="val 8823"/>
             </a:avLst>
           </a:prstGeom>
           <a:solidFill>
             <a:srgbClr val="FFFFFF"/>
           </a:solidFill>
-          <a:ln w="12192">
+          <a:ln w="13716">
             <a:solidFill>
-              <a:srgbClr val="6F9BD1"/>
+              <a:srgbClr val="9DD3B8"/>
             </a:solidFill>
           </a:ln>
         </p:spPr>
         <p:txBody>
-          <a:bodyPr rtlCol="0" anchor="t" lIns="45720" tIns="388620" rIns="45720" bIns="0" wrap="none">
+          <a:bodyPr rtlCol="0" anchor="t" lIns="45720" tIns="411480" rIns="45720" bIns="0" wrap="none">
             <a:noAutofit/>
           </a:bodyPr>
           <a:lstStyle/>
           <a:p>
             <a:pPr algn="ctr">
               <a:lnSpc>
-                <a:spcPts val="1439"/>
+                <a:spcPts val="1560"/>
               </a:lnSpc>
             </a:pPr>
             <a:r>
-              <a:rPr sz="1140" b="1">
+              <a:rPr sz="1200" b="1">
                 <a:solidFill>
-                  <a:srgbClr val="0A2342"/>
+                  <a:srgbClr val="0B3D2E"/>
                 </a:solidFill>
                 <a:latin typeface="Pretendard"/>
                 <a:ea typeface="Pretendard"/>
@@ -16375,11 +16375,11 @@
           <a:p>
             <a:pPr algn="ctr">
               <a:lnSpc>
-                <a:spcPts val="1140"/>
+                <a:spcPts val="1320"/>
               </a:lnSpc>
             </a:pPr>
             <a:r>
-              <a:rPr sz="869" b="0">
+              <a:rPr sz="1019" b="0">
                 <a:solidFill>
                   <a:srgbClr val="3F4E61"/>
                 </a:solidFill>
@@ -16393,11 +16393,11 @@
           <a:p>
             <a:pPr algn="ctr">
               <a:lnSpc>
-                <a:spcPts val="1140"/>
+                <a:spcPts val="1320"/>
               </a:lnSpc>
             </a:pPr>
             <a:r>
-              <a:rPr sz="869" b="0">
+              <a:rPr sz="1019" b="0">
                 <a:solidFill>
                   <a:srgbClr val="3F4E61"/>
                 </a:solidFill>
@@ -16418,7 +16418,7 @@
         </p:nvSpPr>
         <p:spPr>
           <a:xfrm>
-            <a:off x="6816090" y="4945380"/>
+            <a:off x="6816090" y="5143500"/>
             <a:ext cx="228600" cy="228600"/>
           </a:xfrm>
           <a:custGeom>
@@ -17661,7 +17661,7 @@
             </a:pathLst>
           </a:custGeom>
           <a:solidFill>
-            <a:srgbClr val="164B8C"/>
+            <a:srgbClr val="1E6B4F"/>
           </a:solidFill>
           <a:ln>
             <a:noFill/>
@@ -17683,38 +17683,38 @@
         </p:nvSpPr>
         <p:spPr>
           <a:xfrm>
-            <a:off x="7947660" y="4869180"/>
-            <a:ext cx="1790700" cy="929640"/>
+            <a:off x="7947660" y="5044440"/>
+            <a:ext cx="1790700" cy="1036320"/>
           </a:xfrm>
           <a:prstGeom prst="roundRect">
             <a:avLst>
-              <a:gd name="adj" fmla="val 9836"/>
+              <a:gd name="adj" fmla="val 8823"/>
             </a:avLst>
           </a:prstGeom>
           <a:solidFill>
             <a:srgbClr val="FFFFFF"/>
           </a:solidFill>
-          <a:ln w="12192">
+          <a:ln w="13716">
             <a:solidFill>
-              <a:srgbClr val="6F9BD1"/>
+              <a:srgbClr val="9DD3B8"/>
             </a:solidFill>
           </a:ln>
         </p:spPr>
         <p:txBody>
-          <a:bodyPr rtlCol="0" anchor="t" lIns="45720" tIns="461010" rIns="45720" bIns="0" wrap="none">
+          <a:bodyPr rtlCol="0" anchor="t" lIns="45720" tIns="495300" rIns="45720" bIns="0" wrap="none">
             <a:noAutofit/>
           </a:bodyPr>
           <a:lstStyle/>
           <a:p>
             <a:pPr algn="ctr">
               <a:lnSpc>
-                <a:spcPts val="1439"/>
+                <a:spcPts val="1560"/>
               </a:lnSpc>
             </a:pPr>
             <a:r>
-              <a:rPr sz="1140" b="1">
+              <a:rPr sz="1200" b="1">
                 <a:solidFill>
-                  <a:srgbClr val="0A2342"/>
+                  <a:srgbClr val="0B3D2E"/>
                 </a:solidFill>
                 <a:latin typeface="Pretendard"/>
                 <a:ea typeface="Pretendard"/>
@@ -17726,11 +17726,11 @@
           <a:p>
             <a:pPr algn="ctr">
               <a:lnSpc>
-                <a:spcPts val="1140"/>
+                <a:spcPts val="1320"/>
               </a:lnSpc>
             </a:pPr>
             <a:r>
-              <a:rPr sz="869" b="0">
+              <a:rPr sz="1019" b="0">
                 <a:solidFill>
                   <a:srgbClr val="3F4E61"/>
                 </a:solidFill>
@@ -17751,7 +17751,7 @@
         </p:nvSpPr>
         <p:spPr>
           <a:xfrm>
-            <a:off x="8716010" y="5030470"/>
+            <a:off x="8716010" y="5240020"/>
             <a:ext cx="254000" cy="203200"/>
           </a:xfrm>
           <a:custGeom>
@@ -18124,7 +18124,7 @@
             </a:pathLst>
           </a:custGeom>
           <a:solidFill>
-            <a:srgbClr val="164B8C"/>
+            <a:srgbClr val="1E6B4F"/>
           </a:solidFill>
           <a:ln>
             <a:noFill/>
@@ -18146,38 +18146,38 @@
         </p:nvSpPr>
         <p:spPr>
           <a:xfrm>
-            <a:off x="9860280" y="4869180"/>
-            <a:ext cx="1790700" cy="929640"/>
+            <a:off x="9860280" y="5044440"/>
+            <a:ext cx="1790700" cy="1036320"/>
           </a:xfrm>
           <a:prstGeom prst="roundRect">
             <a:avLst>
-              <a:gd name="adj" fmla="val 9836"/>
+              <a:gd name="adj" fmla="val 8823"/>
             </a:avLst>
           </a:prstGeom>
           <a:solidFill>
             <a:srgbClr val="FFFFFF"/>
           </a:solidFill>
-          <a:ln w="12192">
+          <a:ln w="13716">
             <a:solidFill>
-              <a:srgbClr val="6F9BD1"/>
+              <a:srgbClr val="9DD3B8"/>
             </a:solidFill>
           </a:ln>
         </p:spPr>
         <p:txBody>
-          <a:bodyPr rtlCol="0" anchor="t" lIns="45720" tIns="461010" rIns="45720" bIns="0" wrap="none">
+          <a:bodyPr rtlCol="0" anchor="t" lIns="45720" tIns="495300" rIns="45720" bIns="0" wrap="none">
             <a:noAutofit/>
           </a:bodyPr>
           <a:lstStyle/>
           <a:p>
             <a:pPr algn="ctr">
               <a:lnSpc>
-                <a:spcPts val="1439"/>
+                <a:spcPts val="1560"/>
               </a:lnSpc>
             </a:pPr>
             <a:r>
-              <a:rPr sz="1140" b="1">
+              <a:rPr sz="1200" b="1">
                 <a:solidFill>
-                  <a:srgbClr val="0A2342"/>
+                  <a:srgbClr val="0B3D2E"/>
                 </a:solidFill>
                 <a:latin typeface="Pretendard"/>
                 <a:ea typeface="Pretendard"/>
@@ -18189,11 +18189,11 @@
           <a:p>
             <a:pPr algn="ctr">
               <a:lnSpc>
-                <a:spcPts val="1140"/>
+                <a:spcPts val="1320"/>
               </a:lnSpc>
             </a:pPr>
             <a:r>
-              <a:rPr sz="869" b="0">
+              <a:rPr sz="1019" b="0">
                 <a:solidFill>
                   <a:srgbClr val="3F4E61"/>
                 </a:solidFill>
@@ -18214,7 +18214,7 @@
         </p:nvSpPr>
         <p:spPr>
           <a:xfrm>
-            <a:off x="10654030" y="5005070"/>
+            <a:off x="10654030" y="5214620"/>
             <a:ext cx="203200" cy="254000"/>
           </a:xfrm>
           <a:custGeom>
@@ -18534,7 +18534,7 @@
             </a:pathLst>
           </a:custGeom>
           <a:solidFill>
-            <a:srgbClr val="164B8C"/>
+            <a:srgbClr val="1E6B4F"/>
           </a:solidFill>
           <a:ln>
             <a:noFill/>
@@ -18559,7 +18559,7 @@
         </p:nvCxnSpPr>
         <p:spPr>
           <a:xfrm>
-            <a:off x="8244840" y="2682240"/>
+            <a:off x="8244840" y="2880360"/>
             <a:ext cx="457200" cy="0"/>
           </a:xfrm>
           <a:prstGeom prst="line">
@@ -18567,7 +18567,7 @@
           </a:prstGeom>
           <a:ln w="16764">
             <a:solidFill>
-              <a:srgbClr val="1F74C4"/>
+              <a:srgbClr val="2E9E6E"/>
             </a:solidFill>
             <a:prstDash val="dash"/>
             <a:tailEnd type="triangle" w="med" len="med"/>
@@ -18582,8 +18582,8 @@
         </p:nvSpPr>
         <p:spPr>
           <a:xfrm>
-            <a:off x="369570" y="2827020"/>
-            <a:ext cx="327660" cy="205740"/>
+            <a:off x="365760" y="3002280"/>
+            <a:ext cx="335280" cy="213360"/>
           </a:xfrm>
           <a:prstGeom prst="rect">
             <a:avLst/>
@@ -18598,9 +18598,9 @@
           <a:p>
             <a:pPr algn="ctr"/>
             <a:r>
-              <a:rPr sz="1140" b="1">
+              <a:rPr sz="1200" b="1">
                 <a:solidFill>
-                  <a:srgbClr val="164B8C"/>
+                  <a:srgbClr val="1E6B4F"/>
                 </a:solidFill>
                 <a:latin typeface="Pretendard"/>
                 <a:ea typeface="Pretendard"/>
@@ -18619,8 +18619,8 @@
         </p:nvSpPr>
         <p:spPr>
           <a:xfrm>
-            <a:off x="369570" y="3055620"/>
-            <a:ext cx="327660" cy="205740"/>
+            <a:off x="365760" y="3230880"/>
+            <a:ext cx="335280" cy="213360"/>
           </a:xfrm>
           <a:prstGeom prst="rect">
             <a:avLst/>
@@ -18635,9 +18635,9 @@
           <a:p>
             <a:pPr algn="ctr"/>
             <a:r>
-              <a:rPr sz="1140" b="1">
+              <a:rPr sz="1200" b="1">
                 <a:solidFill>
-                  <a:srgbClr val="164B8C"/>
+                  <a:srgbClr val="1E6B4F"/>
                 </a:solidFill>
                 <a:latin typeface="Pretendard"/>
                 <a:ea typeface="Pretendard"/>
@@ -18656,8 +18656,8 @@
         </p:nvSpPr>
         <p:spPr>
           <a:xfrm>
-            <a:off x="369570" y="3284220"/>
-            <a:ext cx="327660" cy="205740"/>
+            <a:off x="365760" y="3459480"/>
+            <a:ext cx="335280" cy="213360"/>
           </a:xfrm>
           <a:prstGeom prst="rect">
             <a:avLst/>
@@ -18672,9 +18672,9 @@
           <a:p>
             <a:pPr algn="ctr"/>
             <a:r>
-              <a:rPr sz="1140" b="1">
+              <a:rPr sz="1200" b="1">
                 <a:solidFill>
-                  <a:srgbClr val="164B8C"/>
+                  <a:srgbClr val="1E6B4F"/>
                 </a:solidFill>
                 <a:latin typeface="Pretendard"/>
                 <a:ea typeface="Pretendard"/>
@@ -18693,8 +18693,8 @@
         </p:nvSpPr>
         <p:spPr>
           <a:xfrm>
-            <a:off x="369570" y="3512820"/>
-            <a:ext cx="327660" cy="205740"/>
+            <a:off x="365760" y="3688080"/>
+            <a:ext cx="335280" cy="213360"/>
           </a:xfrm>
           <a:prstGeom prst="rect">
             <a:avLst/>
@@ -18709,9 +18709,9 @@
           <a:p>
             <a:pPr algn="ctr"/>
             <a:r>
-              <a:rPr sz="1140" b="1">
+              <a:rPr sz="1200" b="1">
                 <a:solidFill>
-                  <a:srgbClr val="164B8C"/>
+                  <a:srgbClr val="1E6B4F"/>
                 </a:solidFill>
                 <a:latin typeface="Pretendard"/>
                 <a:ea typeface="Pretendard"/>
@@ -18731,7 +18731,7 @@
         <p:spPr>
           <a:xfrm>
             <a:off x="381000" y="6309360"/>
-            <a:ext cx="3442335" cy="396240"/>
+            <a:ext cx="3665601" cy="396240"/>
           </a:xfrm>
           <a:prstGeom prst="roundRect">
             <a:avLst>
@@ -18743,7 +18743,7 @@
           </a:solidFill>
           <a:ln w="10668">
             <a:solidFill>
-              <a:srgbClr val="A9C3E2"/>
+              <a:srgbClr val="9DD3B8"/>
             </a:solidFill>
           </a:ln>
         </p:spPr>
@@ -18779,9 +18779,9 @@
           <a:p>
             <a:pPr algn="l"/>
             <a:r>
-              <a:rPr sz="900" b="1">
+              <a:rPr sz="1019" b="1">
                 <a:solidFill>
-                  <a:srgbClr val="0A2342"/>
+                  <a:srgbClr val="0B3D2E"/>
                 </a:solidFill>
                 <a:latin typeface="Pretendard"/>
                 <a:ea typeface="Pretendard"/>
@@ -18808,7 +18808,7 @@
           </a:prstGeom>
           <a:ln w="16764">
             <a:solidFill>
-              <a:srgbClr val="164B8C"/>
+              <a:srgbClr val="1E6B4F"/>
             </a:solidFill>
             <a:tailEnd type="triangle" w="med" len="med"/>
           </a:ln>
@@ -18823,7 +18823,7 @@
         <p:spPr>
           <a:xfrm>
             <a:off x="1341120" y="6309360"/>
-            <a:ext cx="786765" cy="396240"/>
+            <a:ext cx="871347" cy="396240"/>
           </a:xfrm>
           <a:prstGeom prst="rect">
             <a:avLst/>
@@ -18838,7 +18838,7 @@
           <a:p>
             <a:pPr algn="l"/>
             <a:r>
-              <a:rPr sz="900" b="1">
+              <a:rPr sz="1019" b="1">
                 <a:solidFill>
                   <a:srgbClr val="16202C"/>
                 </a:solidFill>
@@ -18859,7 +18859,7 @@
         </p:nvCxnSpPr>
         <p:spPr>
           <a:xfrm>
-            <a:off x="2204085" y="6507480"/>
+            <a:off x="2288667" y="6507480"/>
             <a:ext cx="350520" cy="0"/>
           </a:xfrm>
           <a:prstGeom prst="line">
@@ -18867,7 +18867,7 @@
           </a:prstGeom>
           <a:ln w="16764">
             <a:solidFill>
-              <a:srgbClr val="1F74C4"/>
+              <a:srgbClr val="2E9E6E"/>
             </a:solidFill>
             <a:prstDash val="dash"/>
             <a:tailEnd type="triangle" w="med" len="med"/>
@@ -18882,8 +18882,8 @@
         </p:nvSpPr>
         <p:spPr>
           <a:xfrm>
-            <a:off x="2630805" y="6309360"/>
-            <a:ext cx="1192530" cy="396240"/>
+            <a:off x="2715387" y="6309360"/>
+            <a:ext cx="1331214" cy="396240"/>
           </a:xfrm>
           <a:prstGeom prst="rect">
             <a:avLst/>
@@ -18898,7 +18898,7 @@
           <a:p>
             <a:pPr algn="l"/>
             <a:r>
-              <a:rPr sz="900" b="1">
+              <a:rPr sz="1019" b="1">
                 <a:solidFill>
                   <a:srgbClr val="16202C"/>
                 </a:solidFill>
@@ -18919,8 +18919,8 @@
         </p:nvSpPr>
         <p:spPr>
           <a:xfrm>
-            <a:off x="6726936" y="6385560"/>
-            <a:ext cx="5084064" cy="167640"/>
+            <a:off x="5702808" y="6347460"/>
+            <a:ext cx="6108192" cy="190500"/>
           </a:xfrm>
           <a:prstGeom prst="rect">
             <a:avLst/>
@@ -18935,7 +18935,7 @@
           <a:p>
             <a:pPr algn="r"/>
             <a:r>
-              <a:rPr sz="840" b="0">
+              <a:rPr sz="1019" b="0">
                 <a:solidFill>
                   <a:srgbClr val="3F4E61"/>
                 </a:solidFill>
@@ -18956,8 +18956,8 @@
         </p:nvSpPr>
         <p:spPr>
           <a:xfrm>
-            <a:off x="6758940" y="6553200"/>
-            <a:ext cx="5052060" cy="167640"/>
+            <a:off x="5741670" y="6537960"/>
+            <a:ext cx="6069330" cy="190500"/>
           </a:xfrm>
           <a:prstGeom prst="rect">
             <a:avLst/>
@@ -18972,7 +18972,7 @@
           <a:p>
             <a:pPr algn="r"/>
             <a:r>
-              <a:rPr sz="840" b="0">
+              <a:rPr sz="1019" b="0">
                 <a:solidFill>
                   <a:srgbClr val="3F4E61"/>
                 </a:solidFill>
